--- a/NXProject_Gestao_Inteligente_DevOps.pptx
+++ b/NXProject_Gestao_Inteligente_DevOps.pptx
@@ -5396,7 +5396,8 @@
               </a:rPr>
               <a:t>• Cascata automática por predecessoras
 • Predecessora virtual por recurso
-• Calendário com feriados e horas úteis</a:t>
+• Calendário com feriados e horas úteis
+• Coluna %Daily: ritmo esperado até hoje</a:t>
             </a:r>
           </a:p>
         </p:txBody>
@@ -5715,8 +5716,9 @@
                 </a:solidFill>
               </a:rPr>
               <a:t>• Alocação por pessoa e sprint
-• Alerta de sobrecarga (&gt;100%)
-• Filtro de cronograma por pessoa</a:t>
+• Descoberta e importação de pessoas do DevOps
+• Custo por recurso (importa e calcula)
+• Alerta de sobrecarga (&gt;100%)</a:t>
             </a:r>
           </a:p>
         </p:txBody>
@@ -5876,6 +5878,7 @@
               </a:rPr>
               <a:t>• Datas, horas, estado, sprint, tags e predecessoras
 • Cria work items novos no DevOps
+• Revisão Tech Lead: cria/edita tasks online
 • Relatório detalhado de sincronização</a:t>
             </a:r>
           </a:p>
@@ -6035,8 +6038,8 @@
                 </a:solidFill>
               </a:rPr>
               <a:t>• Atividades em atraso (Fim &lt; hoje e % &lt; 100)
-• Itens sem responsável
-• Dependências circulares e bloqueios</a:t>
+• Desvio %Daily vs % informado
+• Itens sem responsável e dependências circulares</a:t>
             </a:r>
           </a:p>
         </p:txBody>
@@ -9551,40 +9554,30 @@
           </a:p>
         </p:txBody>
       </p:sp>
-      <p:sp>
-        <p:nvSpPr>
-          <p:cNvPr id="8" name="TextBox 7"/>
-          <p:cNvSpPr txBox="1"/>
-          <p:nvPr/>
-        </p:nvSpPr>
-        <p:spPr>
-          <a:xfrm>
-            <a:off x="914400" y="6126480"/>
-            <a:ext cx="10332720" cy="365760"/>
-          </a:xfrm>
-          <a:prstGeom prst="rect">
-            <a:avLst/>
-          </a:prstGeom>
-          <a:noFill/>
-        </p:spPr>
-        <p:txBody>
-          <a:bodyPr wrap="square">
-            <a:spAutoFit/>
-          </a:bodyPr>
-          <a:lstStyle/>
-          <a:p>
-            <a:pPr algn="ctr"/>
-            <a:r>
-              <a:rPr sz="1100" b="0" i="0">
-                <a:solidFill>
-                  <a:srgbClr val="7A9AC8"/>
-                </a:solidFill>
-              </a:rPr>
-              <a:t>Nexus XData Tecnologia Ltda</a:t>
-            </a:r>
-          </a:p>
-        </p:txBody>
-      </p:sp>
+      <p:pic>
+        <p:nvPicPr>
+          <p:cNvPr id="8" name="Picture 7" descr="logo-nexus-xdata-transparent.png"/>
+          <p:cNvPicPr>
+            <a:picLocks noChangeAspect="1"/>
+          </p:cNvPicPr>
+          <p:nvPr/>
+        </p:nvPicPr>
+        <p:blipFill>
+          <a:blip r:embed="rId2"/>
+          <a:stretch>
+            <a:fillRect/>
+          </a:stretch>
+        </p:blipFill>
+        <p:spPr>
+          <a:xfrm>
+            <a:off x="5522976" y="5074920"/>
+            <a:ext cx="1143000" cy="1143000"/>
+          </a:xfrm>
+          <a:prstGeom prst="rect">
+            <a:avLst/>
+          </a:prstGeom>
+        </p:spPr>
+      </p:pic>
     </p:spTree>
   </p:cSld>
   <p:clrMapOvr>

--- a/NXProject_Gestao_Inteligente_DevOps.pptx
+++ b/NXProject_Gestao_Inteligente_DevOps.pptx
@@ -13,6 +13,7 @@
     <p:sldId id="261" r:id="rId12"/>
     <p:sldId id="262" r:id="rId13"/>
     <p:sldId id="263" r:id="rId14"/>
+    <p:sldId id="264" r:id="rId15"/>
   </p:sldIdLst>
   <p:sldSz cx="12188952" cy="6858000" type="screen4x3"/>
   <p:notesSz cx="6858000" cy="9144000"/>
@@ -4162,8 +4163,8 @@
         </p:nvSpPr>
         <p:spPr>
           <a:xfrm>
-            <a:off x="274320" y="2971800"/>
-            <a:ext cx="2194560" cy="3474720"/>
+            <a:off x="182880" y="2971800"/>
+            <a:ext cx="1874519" cy="3474720"/>
           </a:xfrm>
           <a:prstGeom prst="rect">
             <a:avLst/>
@@ -4207,8 +4208,8 @@
         </p:nvSpPr>
         <p:spPr>
           <a:xfrm>
-            <a:off x="274320" y="3154680"/>
-            <a:ext cx="2194560" cy="457200"/>
+            <a:off x="182880" y="3154680"/>
+            <a:ext cx="1874519" cy="457200"/>
           </a:xfrm>
           <a:prstGeom prst="rect">
             <a:avLst/>
@@ -4241,8 +4242,8 @@
         </p:nvSpPr>
         <p:spPr>
           <a:xfrm>
-            <a:off x="365760" y="3657600"/>
-            <a:ext cx="2011680" cy="685800"/>
+            <a:off x="274320" y="3657600"/>
+            <a:ext cx="1691639" cy="685800"/>
           </a:xfrm>
           <a:prstGeom prst="rect">
             <a:avLst/>
@@ -4276,8 +4277,8 @@
         </p:nvSpPr>
         <p:spPr>
           <a:xfrm>
-            <a:off x="411480" y="4434840"/>
-            <a:ext cx="1920240" cy="1737360"/>
+            <a:off x="320040" y="4434840"/>
+            <a:ext cx="1600199" cy="1737360"/>
           </a:xfrm>
           <a:prstGeom prst="rect">
             <a:avLst/>
@@ -4310,8 +4311,8 @@
         </p:nvSpPr>
         <p:spPr>
           <a:xfrm>
-            <a:off x="2615184" y="2971800"/>
-            <a:ext cx="2194560" cy="3474720"/>
+            <a:off x="2167128" y="2971800"/>
+            <a:ext cx="1874519" cy="3474720"/>
           </a:xfrm>
           <a:prstGeom prst="rect">
             <a:avLst/>
@@ -4355,8 +4356,8 @@
         </p:nvSpPr>
         <p:spPr>
           <a:xfrm>
-            <a:off x="2615184" y="3154680"/>
-            <a:ext cx="2194560" cy="457200"/>
+            <a:off x="2167128" y="3154680"/>
+            <a:ext cx="1874519" cy="457200"/>
           </a:xfrm>
           <a:prstGeom prst="rect">
             <a:avLst/>
@@ -4389,8 +4390,8 @@
         </p:nvSpPr>
         <p:spPr>
           <a:xfrm>
-            <a:off x="2706624" y="3657600"/>
-            <a:ext cx="2011680" cy="685800"/>
+            <a:off x="2258568" y="3657600"/>
+            <a:ext cx="1691639" cy="685800"/>
           </a:xfrm>
           <a:prstGeom prst="rect">
             <a:avLst/>
@@ -4424,8 +4425,8 @@
         </p:nvSpPr>
         <p:spPr>
           <a:xfrm>
-            <a:off x="2752344" y="4434840"/>
-            <a:ext cx="1920240" cy="1737360"/>
+            <a:off x="2304288" y="4434840"/>
+            <a:ext cx="1600199" cy="1737360"/>
           </a:xfrm>
           <a:prstGeom prst="rect">
             <a:avLst/>
@@ -4458,8 +4459,8 @@
         </p:nvSpPr>
         <p:spPr>
           <a:xfrm>
-            <a:off x="4956048" y="2971800"/>
-            <a:ext cx="2194560" cy="3474720"/>
+            <a:off x="4151376" y="2971800"/>
+            <a:ext cx="1874519" cy="3474720"/>
           </a:xfrm>
           <a:prstGeom prst="rect">
             <a:avLst/>
@@ -4503,8 +4504,8 @@
         </p:nvSpPr>
         <p:spPr>
           <a:xfrm>
-            <a:off x="4956048" y="3154680"/>
-            <a:ext cx="2194560" cy="457200"/>
+            <a:off x="4151376" y="3154680"/>
+            <a:ext cx="1874519" cy="457200"/>
           </a:xfrm>
           <a:prstGeom prst="rect">
             <a:avLst/>
@@ -4537,8 +4538,8 @@
         </p:nvSpPr>
         <p:spPr>
           <a:xfrm>
-            <a:off x="5047488" y="3657600"/>
-            <a:ext cx="2011680" cy="685800"/>
+            <a:off x="4242816" y="3657600"/>
+            <a:ext cx="1691639" cy="685800"/>
           </a:xfrm>
           <a:prstGeom prst="rect">
             <a:avLst/>
@@ -4572,8 +4573,8 @@
         </p:nvSpPr>
         <p:spPr>
           <a:xfrm>
-            <a:off x="5093208" y="4434840"/>
-            <a:ext cx="1920240" cy="1737360"/>
+            <a:off x="4288536" y="4434840"/>
+            <a:ext cx="1600199" cy="1737360"/>
           </a:xfrm>
           <a:prstGeom prst="rect">
             <a:avLst/>
@@ -4593,7 +4594,7 @@
                   <a:srgbClr val="555F6E"/>
                 </a:solidFill>
               </a:rPr>
-              <a:t>Visualização de barras, dependências, marcos e linha do tempo com zoom ajustável.</a:t>
+              <a:t>Barras, dependências, marcos, caminho crítico e linha de base, com zoom ajustável.</a:t>
             </a:r>
           </a:p>
         </p:txBody>
@@ -4606,8 +4607,8 @@
         </p:nvSpPr>
         <p:spPr>
           <a:xfrm>
-            <a:off x="7296912" y="2971800"/>
-            <a:ext cx="2194560" cy="3474720"/>
+            <a:off x="6135624" y="2971800"/>
+            <a:ext cx="1874519" cy="3474720"/>
           </a:xfrm>
           <a:prstGeom prst="rect">
             <a:avLst/>
@@ -4651,8 +4652,8 @@
         </p:nvSpPr>
         <p:spPr>
           <a:xfrm>
-            <a:off x="7296912" y="3154680"/>
-            <a:ext cx="2194560" cy="457200"/>
+            <a:off x="6135624" y="3154680"/>
+            <a:ext cx="1874519" cy="457200"/>
           </a:xfrm>
           <a:prstGeom prst="rect">
             <a:avLst/>
@@ -4672,7 +4673,7 @@
                   <a:srgbClr val="2D2D2D"/>
                 </a:solidFill>
               </a:rPr>
-              <a:t>👥</a:t>
+              <a:t>🗂️</a:t>
             </a:r>
           </a:p>
         </p:txBody>
@@ -4685,8 +4686,8 @@
         </p:nvSpPr>
         <p:spPr>
           <a:xfrm>
-            <a:off x="7388352" y="3657600"/>
-            <a:ext cx="2011680" cy="685800"/>
+            <a:off x="6227064" y="3657600"/>
+            <a:ext cx="1691639" cy="685800"/>
           </a:xfrm>
           <a:prstGeom prst="rect">
             <a:avLst/>
@@ -4706,8 +4707,8 @@
                   <a:srgbClr val="1A3A6B"/>
                 </a:solidFill>
               </a:rPr>
-              <a:t>Gestão de
-recursos</a:t>
+              <a:t>TaskBoard
+da execução</a:t>
             </a:r>
           </a:p>
         </p:txBody>
@@ -4720,8 +4721,8 @@
         </p:nvSpPr>
         <p:spPr>
           <a:xfrm>
-            <a:off x="7434072" y="4434840"/>
-            <a:ext cx="1920240" cy="1737360"/>
+            <a:off x="6272784" y="4434840"/>
+            <a:ext cx="1600199" cy="1737360"/>
           </a:xfrm>
           <a:prstGeom prst="rect">
             <a:avLst/>
@@ -4741,7 +4742,7 @@
                   <a:srgbClr val="555F6E"/>
                 </a:solidFill>
               </a:rPr>
-              <a:t>Visão de alocação por pessoa, identificação de sobrecargas e conflitos de agenda.</a:t>
+              <a:t>Tasks da sprint por pessoa e estado; o time conduz o dia a dia e o board grava no DevOps.</a:t>
             </a:r>
           </a:p>
         </p:txBody>
@@ -4754,8 +4755,8 @@
         </p:nvSpPr>
         <p:spPr>
           <a:xfrm>
-            <a:off x="9637776" y="2971800"/>
-            <a:ext cx="2194560" cy="3474720"/>
+            <a:off x="8119871" y="2971800"/>
+            <a:ext cx="1874519" cy="3474720"/>
           </a:xfrm>
           <a:prstGeom prst="rect">
             <a:avLst/>
@@ -4799,8 +4800,8 @@
         </p:nvSpPr>
         <p:spPr>
           <a:xfrm>
-            <a:off x="9637776" y="3154680"/>
-            <a:ext cx="2194560" cy="457200"/>
+            <a:off x="8119871" y="3154680"/>
+            <a:ext cx="1874519" cy="457200"/>
           </a:xfrm>
           <a:prstGeom prst="rect">
             <a:avLst/>
@@ -4820,7 +4821,7 @@
                   <a:srgbClr val="2D2D2D"/>
                 </a:solidFill>
               </a:rPr>
-              <a:t>🤖</a:t>
+              <a:t>👥</a:t>
             </a:r>
           </a:p>
         </p:txBody>
@@ -4833,8 +4834,8 @@
         </p:nvSpPr>
         <p:spPr>
           <a:xfrm>
-            <a:off x="9729216" y="3657600"/>
-            <a:ext cx="2011680" cy="685800"/>
+            <a:off x="8211311" y="3657600"/>
+            <a:ext cx="1691639" cy="685800"/>
           </a:xfrm>
           <a:prstGeom prst="rect">
             <a:avLst/>
@@ -4854,8 +4855,8 @@
                   <a:srgbClr val="1A3A6B"/>
                 </a:solidFill>
               </a:rPr>
-              <a:t>Assistente
-IA</a:t>
+              <a:t>Gestão de
+recursos</a:t>
             </a:r>
           </a:p>
         </p:txBody>
@@ -4868,8 +4869,8 @@
         </p:nvSpPr>
         <p:spPr>
           <a:xfrm>
-            <a:off x="9774936" y="4434840"/>
-            <a:ext cx="1920240" cy="1737360"/>
+            <a:off x="8257031" y="4434840"/>
+            <a:ext cx="1600199" cy="1737360"/>
           </a:xfrm>
           <a:prstGeom prst="rect">
             <a:avLst/>
@@ -4889,7 +4890,155 @@
                   <a:srgbClr val="555F6E"/>
                 </a:solidFill>
               </a:rPr>
-              <a:t>Sugere estrutura de tarefas e decomposição de histórias a partir de texto livre.</a:t>
+              <a:t>Alocação por pessoa, sobrecarga, mapa de alocação e custo por recurso.</a:t>
+            </a:r>
+          </a:p>
+        </p:txBody>
+      </p:sp>
+      <p:sp>
+        <p:nvSpPr>
+          <p:cNvPr id="28" name="Rectangle 27"/>
+          <p:cNvSpPr/>
+          <p:nvPr/>
+        </p:nvSpPr>
+        <p:spPr>
+          <a:xfrm>
+            <a:off x="10104119" y="2971800"/>
+            <a:ext cx="1874519" cy="3474720"/>
+          </a:xfrm>
+          <a:prstGeom prst="rect">
+            <a:avLst/>
+          </a:prstGeom>
+          <a:solidFill>
+            <a:srgbClr val="FFFFFF"/>
+          </a:solidFill>
+          <a:ln>
+            <a:solidFill>
+              <a:srgbClr val="FFFFFF"/>
+            </a:solidFill>
+          </a:ln>
+        </p:spPr>
+        <p:style>
+          <a:lnRef idx="1">
+            <a:schemeClr val="accent1"/>
+          </a:lnRef>
+          <a:fillRef idx="3">
+            <a:schemeClr val="accent1"/>
+          </a:fillRef>
+          <a:effectRef idx="2">
+            <a:schemeClr val="accent1"/>
+          </a:effectRef>
+          <a:fontRef idx="minor">
+            <a:schemeClr val="lt1"/>
+          </a:fontRef>
+        </p:style>
+        <p:txBody>
+          <a:bodyPr rtlCol="0" anchor="ctr"/>
+          <a:lstStyle/>
+          <a:p>
+            <a:pPr algn="ctr"/>
+          </a:p>
+        </p:txBody>
+      </p:sp>
+      <p:sp>
+        <p:nvSpPr>
+          <p:cNvPr id="29" name="TextBox 28"/>
+          <p:cNvSpPr txBox="1"/>
+          <p:nvPr/>
+        </p:nvSpPr>
+        <p:spPr>
+          <a:xfrm>
+            <a:off x="10104119" y="3154680"/>
+            <a:ext cx="1874519" cy="457200"/>
+          </a:xfrm>
+          <a:prstGeom prst="rect">
+            <a:avLst/>
+          </a:prstGeom>
+          <a:noFill/>
+        </p:spPr>
+        <p:txBody>
+          <a:bodyPr wrap="square">
+            <a:spAutoFit/>
+          </a:bodyPr>
+          <a:lstStyle/>
+          <a:p>
+            <a:pPr algn="ctr"/>
+            <a:r>
+              <a:rPr sz="2600" b="0" i="0">
+                <a:solidFill>
+                  <a:srgbClr val="2D2D2D"/>
+                </a:solidFill>
+              </a:rPr>
+              <a:t>🤖</a:t>
+            </a:r>
+          </a:p>
+        </p:txBody>
+      </p:sp>
+      <p:sp>
+        <p:nvSpPr>
+          <p:cNvPr id="30" name="TextBox 29"/>
+          <p:cNvSpPr txBox="1"/>
+          <p:nvPr/>
+        </p:nvSpPr>
+        <p:spPr>
+          <a:xfrm>
+            <a:off x="10195559" y="3657600"/>
+            <a:ext cx="1691639" cy="685800"/>
+          </a:xfrm>
+          <a:prstGeom prst="rect">
+            <a:avLst/>
+          </a:prstGeom>
+          <a:noFill/>
+        </p:spPr>
+        <p:txBody>
+          <a:bodyPr wrap="square">
+            <a:spAutoFit/>
+          </a:bodyPr>
+          <a:lstStyle/>
+          <a:p>
+            <a:pPr algn="ctr"/>
+            <a:r>
+              <a:rPr sz="1300" b="1" i="0">
+                <a:solidFill>
+                  <a:srgbClr val="1A3A6B"/>
+                </a:solidFill>
+              </a:rPr>
+              <a:t>IA local
+ou nuvem</a:t>
+            </a:r>
+          </a:p>
+        </p:txBody>
+      </p:sp>
+      <p:sp>
+        <p:nvSpPr>
+          <p:cNvPr id="31" name="TextBox 30"/>
+          <p:cNvSpPr txBox="1"/>
+          <p:nvPr/>
+        </p:nvSpPr>
+        <p:spPr>
+          <a:xfrm>
+            <a:off x="10241279" y="4434840"/>
+            <a:ext cx="1600199" cy="1737360"/>
+          </a:xfrm>
+          <a:prstGeom prst="rect">
+            <a:avLst/>
+          </a:prstGeom>
+          <a:noFill/>
+        </p:spPr>
+        <p:txBody>
+          <a:bodyPr wrap="square">
+            <a:spAutoFit/>
+          </a:bodyPr>
+          <a:lstStyle/>
+          <a:p>
+            <a:pPr algn="ctr"/>
+            <a:r>
+              <a:rPr sz="1050" b="0" i="0">
+                <a:solidFill>
+                  <a:srgbClr val="555F6E"/>
+                </a:solidFill>
+              </a:rPr>
+              <a:t>Sugere estrutura de tarefas; o modelo local roda na própria máquina, sem enviar dados.</a:t>
             </a:r>
           </a:p>
         </p:txBody>
@@ -5076,7 +5225,7 @@
                   <a:srgbClr val="FFFFFF"/>
                 </a:solidFill>
               </a:rPr>
-              <a:t>Principais funcionalidades</a:t>
+              <a:t>Filosofia de planejamento: grau de liberdade</a:t>
             </a:r>
           </a:p>
         </p:txBody>
@@ -5089,8 +5238,121 @@
         </p:nvSpPr>
         <p:spPr>
           <a:xfrm>
-            <a:off x="365760" y="1417320"/>
-            <a:ext cx="3657600" cy="2377440"/>
+            <a:off x="457200" y="1371600"/>
+            <a:ext cx="11247120" cy="1234440"/>
+          </a:xfrm>
+          <a:prstGeom prst="rect">
+            <a:avLst/>
+          </a:prstGeom>
+          <a:solidFill>
+            <a:srgbClr val="2B579A"/>
+          </a:solidFill>
+          <a:ln>
+            <a:solidFill>
+              <a:srgbClr val="2B579A"/>
+            </a:solidFill>
+          </a:ln>
+        </p:spPr>
+        <p:style>
+          <a:lnRef idx="1">
+            <a:schemeClr val="accent1"/>
+          </a:lnRef>
+          <a:fillRef idx="3">
+            <a:schemeClr val="accent1"/>
+          </a:fillRef>
+          <a:effectRef idx="2">
+            <a:schemeClr val="accent1"/>
+          </a:effectRef>
+          <a:fontRef idx="minor">
+            <a:schemeClr val="lt1"/>
+          </a:fontRef>
+        </p:style>
+        <p:txBody>
+          <a:bodyPr rtlCol="0" anchor="ctr"/>
+          <a:lstStyle/>
+          <a:p>
+            <a:pPr algn="ctr"/>
+          </a:p>
+        </p:txBody>
+      </p:sp>
+      <p:sp>
+        <p:nvSpPr>
+          <p:cNvPr id="7" name="TextBox 6"/>
+          <p:cNvSpPr txBox="1"/>
+          <p:nvPr/>
+        </p:nvSpPr>
+        <p:spPr>
+          <a:xfrm>
+            <a:off x="731520" y="1481328"/>
+            <a:ext cx="10698480" cy="1005840"/>
+          </a:xfrm>
+          <a:prstGeom prst="rect">
+            <a:avLst/>
+          </a:prstGeom>
+          <a:noFill/>
+        </p:spPr>
+        <p:txBody>
+          <a:bodyPr wrap="square">
+            <a:spAutoFit/>
+          </a:bodyPr>
+          <a:lstStyle/>
+          <a:p>
+            <a:pPr algn="ctr"/>
+            <a:r>
+              <a:rPr sz="1400" b="0" i="0">
+                <a:solidFill>
+                  <a:srgbClr val="FFFFFF"/>
+                </a:solidFill>
+              </a:rPr>
+              <a:t>O NXProject planeja até o nível de Story. As Tasks podem ser trazidas para o cronograma, mas o objetivo é que o time detalhe e crie as tarefas durante a execução, apoiado pelo TaskBoard — o que traz mais agilidade para o projeto.</a:t>
+            </a:r>
+          </a:p>
+        </p:txBody>
+      </p:sp>
+      <p:sp>
+        <p:nvSpPr>
+          <p:cNvPr id="8" name="TextBox 7"/>
+          <p:cNvSpPr txBox="1"/>
+          <p:nvPr/>
+        </p:nvSpPr>
+        <p:spPr>
+          <a:xfrm>
+            <a:off x="457200" y="2788920"/>
+            <a:ext cx="11247120" cy="548640"/>
+          </a:xfrm>
+          <a:prstGeom prst="rect">
+            <a:avLst/>
+          </a:prstGeom>
+          <a:noFill/>
+        </p:spPr>
+        <p:txBody>
+          <a:bodyPr wrap="square">
+            <a:spAutoFit/>
+          </a:bodyPr>
+          <a:lstStyle/>
+          <a:p>
+            <a:pPr algn="ctr"/>
+            <a:r>
+              <a:rPr sz="1200" b="0" i="1">
+                <a:solidFill>
+                  <a:srgbClr val="555F6E"/>
+                </a:solidFill>
+              </a:rPr>
+              <a:t>Inspirado no conceito matemático de grau de liberdade: definir os limites do sistema sem engessar o movimento dentro deles.</a:t>
+            </a:r>
+          </a:p>
+        </p:txBody>
+      </p:sp>
+      <p:sp>
+        <p:nvSpPr>
+          <p:cNvPr id="9" name="Rectangle 8"/>
+          <p:cNvSpPr/>
+          <p:nvPr/>
+        </p:nvSpPr>
+        <p:spPr>
+          <a:xfrm>
+            <a:off x="457200" y="3611880"/>
+            <a:ext cx="3566160" cy="2377440"/>
           </a:xfrm>
           <a:prstGeom prst="rect">
             <a:avLst/>
@@ -5128,24 +5390,24 @@
       </p:sp>
       <p:sp>
         <p:nvSpPr>
-          <p:cNvPr id="7" name="Rectangle 6"/>
+          <p:cNvPr id="10" name="Rectangle 9"/>
           <p:cNvSpPr/>
           <p:nvPr/>
         </p:nvSpPr>
         <p:spPr>
           <a:xfrm>
-            <a:off x="365760" y="1417320"/>
-            <a:ext cx="3657600" cy="411480"/>
+            <a:off x="457200" y="3611880"/>
+            <a:ext cx="3566160" cy="54864"/>
           </a:xfrm>
           <a:prstGeom prst="rect">
             <a:avLst/>
           </a:prstGeom>
           <a:solidFill>
-            <a:srgbClr val="2B579A"/>
+            <a:srgbClr val="E87B00"/>
           </a:solidFill>
           <a:ln>
             <a:solidFill>
-              <a:srgbClr val="2B579A"/>
+              <a:srgbClr val="E87B00"/>
             </a:solidFill>
           </a:ln>
         </p:spPr>
@@ -5173,14 +5435,14 @@
       </p:sp>
       <p:sp>
         <p:nvSpPr>
-          <p:cNvPr id="8" name="TextBox 7"/>
+          <p:cNvPr id="11" name="TextBox 10"/>
           <p:cNvSpPr txBox="1"/>
           <p:nvPr/>
         </p:nvSpPr>
         <p:spPr>
           <a:xfrm>
-            <a:off x="502920" y="1463040"/>
-            <a:ext cx="3474720" cy="347472"/>
+            <a:off x="640080" y="3840480"/>
+            <a:ext cx="3200400" cy="457200"/>
           </a:xfrm>
           <a:prstGeom prst="rect">
             <a:avLst/>
@@ -5193,28 +5455,28 @@
           </a:bodyPr>
           <a:lstStyle/>
           <a:p>
-            <a:pPr algn="l"/>
-            <a:r>
-              <a:rPr sz="1200" b="1" i="0">
-                <a:solidFill>
-                  <a:srgbClr val="FFFFFF"/>
+            <a:pPr algn="ctr"/>
+            <a:r>
+              <a:rPr sz="1300" b="1" i="0">
+                <a:solidFill>
+                  <a:srgbClr val="1A3A6B"/>
                 </a:solidFill>
               </a:rPr>
-              <a:t>Importação Azure DevOps</a:t>
-            </a:r>
-          </a:p>
-        </p:txBody>
-      </p:sp>
-      <p:sp>
-        <p:nvSpPr>
-          <p:cNvPr id="9" name="TextBox 8"/>
+              <a:t>A gestão define os limites</a:t>
+            </a:r>
+          </a:p>
+        </p:txBody>
+      </p:sp>
+      <p:sp>
+        <p:nvSpPr>
+          <p:cNvPr id="12" name="TextBox 11"/>
           <p:cNvSpPr txBox="1"/>
           <p:nvPr/>
         </p:nvSpPr>
         <p:spPr>
           <a:xfrm>
-            <a:off x="502920" y="1892808"/>
-            <a:ext cx="3429000" cy="1828800"/>
+            <a:off x="640080" y="4526280"/>
+            <a:ext cx="3200400" cy="1371600"/>
           </a:xfrm>
           <a:prstGeom prst="rect">
             <a:avLst/>
@@ -5227,30 +5489,29 @@
           </a:bodyPr>
           <a:lstStyle/>
           <a:p>
-            <a:pPr algn="l"/>
-            <a:r>
-              <a:rPr sz="1050" b="0" i="0">
+            <a:pPr algn="ctr"/>
+            <a:r>
+              <a:rPr sz="1100" b="0" i="0">
                 <a:solidFill>
                   <a:srgbClr val="555F6E"/>
                 </a:solidFill>
               </a:rPr>
-              <a:t>• Hierarquia Project → Epic → Feature → Story
-• Estimativas, datas, sprints e responsáveis
-• Predecessoras e bloqueios (tag Block)</a:t>
-            </a:r>
-          </a:p>
-        </p:txBody>
-      </p:sp>
-      <p:sp>
-        <p:nvSpPr>
-          <p:cNvPr id="10" name="Rectangle 9"/>
+              <a:t>Datas, recursos, dependências e prioridade — no nível de Epic, Feature e Story.
+É o que sustenta prazo, capacidade e risco.</a:t>
+            </a:r>
+          </a:p>
+        </p:txBody>
+      </p:sp>
+      <p:sp>
+        <p:nvSpPr>
+          <p:cNvPr id="13" name="Rectangle 12"/>
           <p:cNvSpPr/>
           <p:nvPr/>
         </p:nvSpPr>
         <p:spPr>
           <a:xfrm>
-            <a:off x="4297680" y="1417320"/>
-            <a:ext cx="3657600" cy="2377440"/>
+            <a:off x="4297680" y="3611880"/>
+            <a:ext cx="3566160" cy="2377440"/>
           </a:xfrm>
           <a:prstGeom prst="rect">
             <a:avLst/>
@@ -5288,24 +5549,24 @@
       </p:sp>
       <p:sp>
         <p:nvSpPr>
-          <p:cNvPr id="11" name="Rectangle 10"/>
+          <p:cNvPr id="14" name="Rectangle 13"/>
           <p:cNvSpPr/>
           <p:nvPr/>
         </p:nvSpPr>
         <p:spPr>
           <a:xfrm>
-            <a:off x="4297680" y="1417320"/>
-            <a:ext cx="3657600" cy="411480"/>
+            <a:off x="4297680" y="3611880"/>
+            <a:ext cx="3566160" cy="54864"/>
           </a:xfrm>
           <a:prstGeom prst="rect">
             <a:avLst/>
           </a:prstGeom>
           <a:solidFill>
-            <a:srgbClr val="2B579A"/>
+            <a:srgbClr val="E87B00"/>
           </a:solidFill>
           <a:ln>
             <a:solidFill>
-              <a:srgbClr val="2B579A"/>
+              <a:srgbClr val="E87B00"/>
             </a:solidFill>
           </a:ln>
         </p:spPr>
@@ -5333,14 +5594,14 @@
       </p:sp>
       <p:sp>
         <p:nvSpPr>
-          <p:cNvPr id="12" name="TextBox 11"/>
+          <p:cNvPr id="15" name="TextBox 14"/>
           <p:cNvSpPr txBox="1"/>
           <p:nvPr/>
         </p:nvSpPr>
         <p:spPr>
           <a:xfrm>
-            <a:off x="4434840" y="1463040"/>
-            <a:ext cx="3474720" cy="347472"/>
+            <a:off x="4480560" y="3840480"/>
+            <a:ext cx="3200400" cy="457200"/>
           </a:xfrm>
           <a:prstGeom prst="rect">
             <a:avLst/>
@@ -5353,28 +5614,28 @@
           </a:bodyPr>
           <a:lstStyle/>
           <a:p>
-            <a:pPr algn="l"/>
-            <a:r>
-              <a:rPr sz="1200" b="1" i="0">
-                <a:solidFill>
-                  <a:srgbClr val="FFFFFF"/>
+            <a:pPr algn="ctr"/>
+            <a:r>
+              <a:rPr sz="1300" b="1" i="0">
+                <a:solidFill>
+                  <a:srgbClr val="1A3A6B"/>
                 </a:solidFill>
               </a:rPr>
-              <a:t>Cronograma inteligente</a:t>
-            </a:r>
-          </a:p>
-        </p:txBody>
-      </p:sp>
-      <p:sp>
-        <p:nvSpPr>
-          <p:cNvPr id="13" name="TextBox 12"/>
+              <a:t>O time navega dentro deles</a:t>
+            </a:r>
+          </a:p>
+        </p:txBody>
+      </p:sp>
+      <p:sp>
+        <p:nvSpPr>
+          <p:cNvPr id="16" name="TextBox 15"/>
           <p:cNvSpPr txBox="1"/>
           <p:nvPr/>
         </p:nvSpPr>
         <p:spPr>
           <a:xfrm>
-            <a:off x="4434840" y="1892808"/>
-            <a:ext cx="3429000" cy="1828800"/>
+            <a:off x="4480560" y="4526280"/>
+            <a:ext cx="3200400" cy="1371600"/>
           </a:xfrm>
           <a:prstGeom prst="rect">
             <a:avLst/>
@@ -5387,31 +5648,29 @@
           </a:bodyPr>
           <a:lstStyle/>
           <a:p>
-            <a:pPr algn="l"/>
-            <a:r>
-              <a:rPr sz="1050" b="0" i="0">
+            <a:pPr algn="ctr"/>
+            <a:r>
+              <a:rPr sz="1100" b="0" i="0">
                 <a:solidFill>
                   <a:srgbClr val="555F6E"/>
                 </a:solidFill>
               </a:rPr>
-              <a:t>• Cascata automática por predecessoras
-• Predecessora virtual por recurso
-• Calendário com feriados e horas úteis
-• Coluna %Daily: ritmo esperado até hoje</a:t>
-            </a:r>
-          </a:p>
-        </p:txBody>
-      </p:sp>
-      <p:sp>
-        <p:nvSpPr>
-          <p:cNvPr id="14" name="Rectangle 13"/>
+              <a:t>A Task nasce na execução, com quem faz: decomposição, sequência e ajuste fino
+acontecem no TaskBoard, sem esperar replanejamento.</a:t>
+            </a:r>
+          </a:p>
+        </p:txBody>
+      </p:sp>
+      <p:sp>
+        <p:nvSpPr>
+          <p:cNvPr id="17" name="Rectangle 16"/>
           <p:cNvSpPr/>
           <p:nvPr/>
         </p:nvSpPr>
         <p:spPr>
           <a:xfrm>
-            <a:off x="8229600" y="1417320"/>
-            <a:ext cx="3657600" cy="2377440"/>
+            <a:off x="8138160" y="3611880"/>
+            <a:ext cx="3566160" cy="2377440"/>
           </a:xfrm>
           <a:prstGeom prst="rect">
             <a:avLst/>
@@ -5449,24 +5708,24 @@
       </p:sp>
       <p:sp>
         <p:nvSpPr>
-          <p:cNvPr id="15" name="Rectangle 14"/>
+          <p:cNvPr id="18" name="Rectangle 17"/>
           <p:cNvSpPr/>
           <p:nvPr/>
         </p:nvSpPr>
         <p:spPr>
           <a:xfrm>
-            <a:off x="8229600" y="1417320"/>
-            <a:ext cx="3657600" cy="411480"/>
+            <a:off x="8138160" y="3611880"/>
+            <a:ext cx="3566160" cy="54864"/>
           </a:xfrm>
           <a:prstGeom prst="rect">
             <a:avLst/>
           </a:prstGeom>
           <a:solidFill>
-            <a:srgbClr val="2B579A"/>
+            <a:srgbClr val="E87B00"/>
           </a:solidFill>
           <a:ln>
             <a:solidFill>
-              <a:srgbClr val="2B579A"/>
+              <a:srgbClr val="E87B00"/>
             </a:solidFill>
           </a:ln>
         </p:spPr>
@@ -5494,14 +5753,14 @@
       </p:sp>
       <p:sp>
         <p:nvSpPr>
-          <p:cNvPr id="16" name="TextBox 15"/>
+          <p:cNvPr id="19" name="TextBox 18"/>
           <p:cNvSpPr txBox="1"/>
           <p:nvPr/>
         </p:nvSpPr>
         <p:spPr>
           <a:xfrm>
-            <a:off x="8366760" y="1463040"/>
-            <a:ext cx="3474720" cy="347472"/>
+            <a:off x="8321040" y="3840480"/>
+            <a:ext cx="3200400" cy="457200"/>
           </a:xfrm>
           <a:prstGeom prst="rect">
             <a:avLst/>
@@ -5514,28 +5773,28 @@
           </a:bodyPr>
           <a:lstStyle/>
           <a:p>
-            <a:pPr algn="l"/>
-            <a:r>
-              <a:rPr sz="1200" b="1" i="0">
-                <a:solidFill>
-                  <a:srgbClr val="FFFFFF"/>
+            <a:pPr algn="ctr"/>
+            <a:r>
+              <a:rPr sz="1300" b="1" i="0">
+                <a:solidFill>
+                  <a:srgbClr val="1A3A6B"/>
                 </a:solidFill>
               </a:rPr>
-              <a:t>Gráfico Gantt</a:t>
-            </a:r>
-          </a:p>
-        </p:txBody>
-      </p:sp>
-      <p:sp>
-        <p:nvSpPr>
-          <p:cNvPr id="17" name="TextBox 16"/>
+              <a:t>Os dois lados enxergam o mesmo</a:t>
+            </a:r>
+          </a:p>
+        </p:txBody>
+      </p:sp>
+      <p:sp>
+        <p:nvSpPr>
+          <p:cNvPr id="20" name="TextBox 19"/>
           <p:cNvSpPr txBox="1"/>
           <p:nvPr/>
         </p:nvSpPr>
         <p:spPr>
           <a:xfrm>
-            <a:off x="8366760" y="1892808"/>
-            <a:ext cx="3429000" cy="1828800"/>
+            <a:off x="8321040" y="4526280"/>
+            <a:ext cx="3200400" cy="1371600"/>
           </a:xfrm>
           <a:prstGeom prst="rect">
             <a:avLst/>
@@ -5548,498 +5807,15 @@
           </a:bodyPr>
           <a:lstStyle/>
           <a:p>
-            <a:pPr algn="l"/>
-            <a:r>
-              <a:rPr sz="1050" b="0" i="0">
+            <a:pPr algn="ctr"/>
+            <a:r>
+              <a:rPr sz="1100" b="0" i="0">
                 <a:solidFill>
                   <a:srgbClr val="555F6E"/>
                 </a:solidFill>
               </a:rPr>
-              <a:t>• Barras, marcos (milestones), setas de dependência
-• Zoom: Dia, Semana, Sprint, Mês, Trimestre
-• Arrastar para replanejar visualmente</a:t>
-            </a:r>
-          </a:p>
-        </p:txBody>
-      </p:sp>
-      <p:sp>
-        <p:nvSpPr>
-          <p:cNvPr id="18" name="Rectangle 17"/>
-          <p:cNvSpPr/>
-          <p:nvPr/>
-        </p:nvSpPr>
-        <p:spPr>
-          <a:xfrm>
-            <a:off x="365760" y="4023360"/>
-            <a:ext cx="3657600" cy="2377440"/>
-          </a:xfrm>
-          <a:prstGeom prst="rect">
-            <a:avLst/>
-          </a:prstGeom>
-          <a:solidFill>
-            <a:srgbClr val="FFFFFF"/>
-          </a:solidFill>
-          <a:ln>
-            <a:solidFill>
-              <a:srgbClr val="FFFFFF"/>
-            </a:solidFill>
-          </a:ln>
-        </p:spPr>
-        <p:style>
-          <a:lnRef idx="1">
-            <a:schemeClr val="accent1"/>
-          </a:lnRef>
-          <a:fillRef idx="3">
-            <a:schemeClr val="accent1"/>
-          </a:fillRef>
-          <a:effectRef idx="2">
-            <a:schemeClr val="accent1"/>
-          </a:effectRef>
-          <a:fontRef idx="minor">
-            <a:schemeClr val="lt1"/>
-          </a:fontRef>
-        </p:style>
-        <p:txBody>
-          <a:bodyPr rtlCol="0" anchor="ctr"/>
-          <a:lstStyle/>
-          <a:p>
-            <a:pPr algn="ctr"/>
-          </a:p>
-        </p:txBody>
-      </p:sp>
-      <p:sp>
-        <p:nvSpPr>
-          <p:cNvPr id="19" name="Rectangle 18"/>
-          <p:cNvSpPr/>
-          <p:nvPr/>
-        </p:nvSpPr>
-        <p:spPr>
-          <a:xfrm>
-            <a:off x="365760" y="4023360"/>
-            <a:ext cx="3657600" cy="411480"/>
-          </a:xfrm>
-          <a:prstGeom prst="rect">
-            <a:avLst/>
-          </a:prstGeom>
-          <a:solidFill>
-            <a:srgbClr val="2B579A"/>
-          </a:solidFill>
-          <a:ln>
-            <a:solidFill>
-              <a:srgbClr val="2B579A"/>
-            </a:solidFill>
-          </a:ln>
-        </p:spPr>
-        <p:style>
-          <a:lnRef idx="1">
-            <a:schemeClr val="accent1"/>
-          </a:lnRef>
-          <a:fillRef idx="3">
-            <a:schemeClr val="accent1"/>
-          </a:fillRef>
-          <a:effectRef idx="2">
-            <a:schemeClr val="accent1"/>
-          </a:effectRef>
-          <a:fontRef idx="minor">
-            <a:schemeClr val="lt1"/>
-          </a:fontRef>
-        </p:style>
-        <p:txBody>
-          <a:bodyPr rtlCol="0" anchor="ctr"/>
-          <a:lstStyle/>
-          <a:p>
-            <a:pPr algn="ctr"/>
-          </a:p>
-        </p:txBody>
-      </p:sp>
-      <p:sp>
-        <p:nvSpPr>
-          <p:cNvPr id="20" name="TextBox 19"/>
-          <p:cNvSpPr txBox="1"/>
-          <p:nvPr/>
-        </p:nvSpPr>
-        <p:spPr>
-          <a:xfrm>
-            <a:off x="502920" y="4069080"/>
-            <a:ext cx="3474720" cy="347472"/>
-          </a:xfrm>
-          <a:prstGeom prst="rect">
-            <a:avLst/>
-          </a:prstGeom>
-          <a:noFill/>
-        </p:spPr>
-        <p:txBody>
-          <a:bodyPr wrap="square">
-            <a:spAutoFit/>
-          </a:bodyPr>
-          <a:lstStyle/>
-          <a:p>
-            <a:pPr algn="l"/>
-            <a:r>
-              <a:rPr sz="1200" b="1" i="0">
-                <a:solidFill>
-                  <a:srgbClr val="FFFFFF"/>
-                </a:solidFill>
-              </a:rPr>
-              <a:t>Gestão de recursos</a:t>
-            </a:r>
-          </a:p>
-        </p:txBody>
-      </p:sp>
-      <p:sp>
-        <p:nvSpPr>
-          <p:cNvPr id="21" name="TextBox 20"/>
-          <p:cNvSpPr txBox="1"/>
-          <p:nvPr/>
-        </p:nvSpPr>
-        <p:spPr>
-          <a:xfrm>
-            <a:off x="502920" y="4498848"/>
-            <a:ext cx="3429000" cy="1828800"/>
-          </a:xfrm>
-          <a:prstGeom prst="rect">
-            <a:avLst/>
-          </a:prstGeom>
-          <a:noFill/>
-        </p:spPr>
-        <p:txBody>
-          <a:bodyPr wrap="square">
-            <a:spAutoFit/>
-          </a:bodyPr>
-          <a:lstStyle/>
-          <a:p>
-            <a:pPr algn="l"/>
-            <a:r>
-              <a:rPr sz="1050" b="0" i="0">
-                <a:solidFill>
-                  <a:srgbClr val="555F6E"/>
-                </a:solidFill>
-              </a:rPr>
-              <a:t>• Alocação por pessoa e sprint
-• Descoberta e importação de pessoas do DevOps
-• Custo por recurso (importa e calcula)
-• Alerta de sobrecarga (&gt;100%)</a:t>
-            </a:r>
-          </a:p>
-        </p:txBody>
-      </p:sp>
-      <p:sp>
-        <p:nvSpPr>
-          <p:cNvPr id="22" name="Rectangle 21"/>
-          <p:cNvSpPr/>
-          <p:nvPr/>
-        </p:nvSpPr>
-        <p:spPr>
-          <a:xfrm>
-            <a:off x="4297680" y="4023360"/>
-            <a:ext cx="3657600" cy="2377440"/>
-          </a:xfrm>
-          <a:prstGeom prst="rect">
-            <a:avLst/>
-          </a:prstGeom>
-          <a:solidFill>
-            <a:srgbClr val="FFFFFF"/>
-          </a:solidFill>
-          <a:ln>
-            <a:solidFill>
-              <a:srgbClr val="FFFFFF"/>
-            </a:solidFill>
-          </a:ln>
-        </p:spPr>
-        <p:style>
-          <a:lnRef idx="1">
-            <a:schemeClr val="accent1"/>
-          </a:lnRef>
-          <a:fillRef idx="3">
-            <a:schemeClr val="accent1"/>
-          </a:fillRef>
-          <a:effectRef idx="2">
-            <a:schemeClr val="accent1"/>
-          </a:effectRef>
-          <a:fontRef idx="minor">
-            <a:schemeClr val="lt1"/>
-          </a:fontRef>
-        </p:style>
-        <p:txBody>
-          <a:bodyPr rtlCol="0" anchor="ctr"/>
-          <a:lstStyle/>
-          <a:p>
-            <a:pPr algn="ctr"/>
-          </a:p>
-        </p:txBody>
-      </p:sp>
-      <p:sp>
-        <p:nvSpPr>
-          <p:cNvPr id="23" name="Rectangle 22"/>
-          <p:cNvSpPr/>
-          <p:nvPr/>
-        </p:nvSpPr>
-        <p:spPr>
-          <a:xfrm>
-            <a:off x="4297680" y="4023360"/>
-            <a:ext cx="3657600" cy="411480"/>
-          </a:xfrm>
-          <a:prstGeom prst="rect">
-            <a:avLst/>
-          </a:prstGeom>
-          <a:solidFill>
-            <a:srgbClr val="2B579A"/>
-          </a:solidFill>
-          <a:ln>
-            <a:solidFill>
-              <a:srgbClr val="2B579A"/>
-            </a:solidFill>
-          </a:ln>
-        </p:spPr>
-        <p:style>
-          <a:lnRef idx="1">
-            <a:schemeClr val="accent1"/>
-          </a:lnRef>
-          <a:fillRef idx="3">
-            <a:schemeClr val="accent1"/>
-          </a:fillRef>
-          <a:effectRef idx="2">
-            <a:schemeClr val="accent1"/>
-          </a:effectRef>
-          <a:fontRef idx="minor">
-            <a:schemeClr val="lt1"/>
-          </a:fontRef>
-        </p:style>
-        <p:txBody>
-          <a:bodyPr rtlCol="0" anchor="ctr"/>
-          <a:lstStyle/>
-          <a:p>
-            <a:pPr algn="ctr"/>
-          </a:p>
-        </p:txBody>
-      </p:sp>
-      <p:sp>
-        <p:nvSpPr>
-          <p:cNvPr id="24" name="TextBox 23"/>
-          <p:cNvSpPr txBox="1"/>
-          <p:nvPr/>
-        </p:nvSpPr>
-        <p:spPr>
-          <a:xfrm>
-            <a:off x="4434840" y="4069080"/>
-            <a:ext cx="3474720" cy="347472"/>
-          </a:xfrm>
-          <a:prstGeom prst="rect">
-            <a:avLst/>
-          </a:prstGeom>
-          <a:noFill/>
-        </p:spPr>
-        <p:txBody>
-          <a:bodyPr wrap="square">
-            <a:spAutoFit/>
-          </a:bodyPr>
-          <a:lstStyle/>
-          <a:p>
-            <a:pPr algn="l"/>
-            <a:r>
-              <a:rPr sz="1200" b="1" i="0">
-                <a:solidFill>
-                  <a:srgbClr val="FFFFFF"/>
-                </a:solidFill>
-              </a:rPr>
-              <a:t>Sincronização bidirecional</a:t>
-            </a:r>
-          </a:p>
-        </p:txBody>
-      </p:sp>
-      <p:sp>
-        <p:nvSpPr>
-          <p:cNvPr id="25" name="TextBox 24"/>
-          <p:cNvSpPr txBox="1"/>
-          <p:nvPr/>
-        </p:nvSpPr>
-        <p:spPr>
-          <a:xfrm>
-            <a:off x="4434840" y="4498848"/>
-            <a:ext cx="3429000" cy="1828800"/>
-          </a:xfrm>
-          <a:prstGeom prst="rect">
-            <a:avLst/>
-          </a:prstGeom>
-          <a:noFill/>
-        </p:spPr>
-        <p:txBody>
-          <a:bodyPr wrap="square">
-            <a:spAutoFit/>
-          </a:bodyPr>
-          <a:lstStyle/>
-          <a:p>
-            <a:pPr algn="l"/>
-            <a:r>
-              <a:rPr sz="1050" b="0" i="0">
-                <a:solidFill>
-                  <a:srgbClr val="555F6E"/>
-                </a:solidFill>
-              </a:rPr>
-              <a:t>• Datas, horas, estado, sprint, tags e predecessoras
-• Cria work items novos no DevOps
-• Revisão Tech Lead: cria/edita tasks online
-• Relatório detalhado de sincronização</a:t>
-            </a:r>
-          </a:p>
-        </p:txBody>
-      </p:sp>
-      <p:sp>
-        <p:nvSpPr>
-          <p:cNvPr id="26" name="Rectangle 25"/>
-          <p:cNvSpPr/>
-          <p:nvPr/>
-        </p:nvSpPr>
-        <p:spPr>
-          <a:xfrm>
-            <a:off x="8229600" y="4023360"/>
-            <a:ext cx="3657600" cy="2377440"/>
-          </a:xfrm>
-          <a:prstGeom prst="rect">
-            <a:avLst/>
-          </a:prstGeom>
-          <a:solidFill>
-            <a:srgbClr val="FFFFFF"/>
-          </a:solidFill>
-          <a:ln>
-            <a:solidFill>
-              <a:srgbClr val="FFFFFF"/>
-            </a:solidFill>
-          </a:ln>
-        </p:spPr>
-        <p:style>
-          <a:lnRef idx="1">
-            <a:schemeClr val="accent1"/>
-          </a:lnRef>
-          <a:fillRef idx="3">
-            <a:schemeClr val="accent1"/>
-          </a:fillRef>
-          <a:effectRef idx="2">
-            <a:schemeClr val="accent1"/>
-          </a:effectRef>
-          <a:fontRef idx="minor">
-            <a:schemeClr val="lt1"/>
-          </a:fontRef>
-        </p:style>
-        <p:txBody>
-          <a:bodyPr rtlCol="0" anchor="ctr"/>
-          <a:lstStyle/>
-          <a:p>
-            <a:pPr algn="ctr"/>
-          </a:p>
-        </p:txBody>
-      </p:sp>
-      <p:sp>
-        <p:nvSpPr>
-          <p:cNvPr id="27" name="Rectangle 26"/>
-          <p:cNvSpPr/>
-          <p:nvPr/>
-        </p:nvSpPr>
-        <p:spPr>
-          <a:xfrm>
-            <a:off x="8229600" y="4023360"/>
-            <a:ext cx="3657600" cy="411480"/>
-          </a:xfrm>
-          <a:prstGeom prst="rect">
-            <a:avLst/>
-          </a:prstGeom>
-          <a:solidFill>
-            <a:srgbClr val="2B579A"/>
-          </a:solidFill>
-          <a:ln>
-            <a:solidFill>
-              <a:srgbClr val="2B579A"/>
-            </a:solidFill>
-          </a:ln>
-        </p:spPr>
-        <p:style>
-          <a:lnRef idx="1">
-            <a:schemeClr val="accent1"/>
-          </a:lnRef>
-          <a:fillRef idx="3">
-            <a:schemeClr val="accent1"/>
-          </a:fillRef>
-          <a:effectRef idx="2">
-            <a:schemeClr val="accent1"/>
-          </a:effectRef>
-          <a:fontRef idx="minor">
-            <a:schemeClr val="lt1"/>
-          </a:fontRef>
-        </p:style>
-        <p:txBody>
-          <a:bodyPr rtlCol="0" anchor="ctr"/>
-          <a:lstStyle/>
-          <a:p>
-            <a:pPr algn="ctr"/>
-          </a:p>
-        </p:txBody>
-      </p:sp>
-      <p:sp>
-        <p:nvSpPr>
-          <p:cNvPr id="28" name="TextBox 27"/>
-          <p:cNvSpPr txBox="1"/>
-          <p:nvPr/>
-        </p:nvSpPr>
-        <p:spPr>
-          <a:xfrm>
-            <a:off x="8366760" y="4069080"/>
-            <a:ext cx="3474720" cy="347472"/>
-          </a:xfrm>
-          <a:prstGeom prst="rect">
-            <a:avLst/>
-          </a:prstGeom>
-          <a:noFill/>
-        </p:spPr>
-        <p:txBody>
-          <a:bodyPr wrap="square">
-            <a:spAutoFit/>
-          </a:bodyPr>
-          <a:lstStyle/>
-          <a:p>
-            <a:pPr algn="l"/>
-            <a:r>
-              <a:rPr sz="1200" b="1" i="0">
-                <a:solidFill>
-                  <a:srgbClr val="FFFFFF"/>
-                </a:solidFill>
-              </a:rPr>
-              <a:t>Health Check</a:t>
-            </a:r>
-          </a:p>
-        </p:txBody>
-      </p:sp>
-      <p:sp>
-        <p:nvSpPr>
-          <p:cNvPr id="29" name="TextBox 28"/>
-          <p:cNvSpPr txBox="1"/>
-          <p:nvPr/>
-        </p:nvSpPr>
-        <p:spPr>
-          <a:xfrm>
-            <a:off x="8366760" y="4498848"/>
-            <a:ext cx="3429000" cy="1828800"/>
-          </a:xfrm>
-          <a:prstGeom prst="rect">
-            <a:avLst/>
-          </a:prstGeom>
-          <a:noFill/>
-        </p:spPr>
-        <p:txBody>
-          <a:bodyPr wrap="square">
-            <a:spAutoFit/>
-          </a:bodyPr>
-          <a:lstStyle/>
-          <a:p>
-            <a:pPr algn="l"/>
-            <a:r>
-              <a:rPr sz="1050" b="0" i="0">
-                <a:solidFill>
-                  <a:srgbClr val="555F6E"/>
-                </a:solidFill>
-              </a:rPr>
-              <a:t>• Atividades em atraso (Fim &lt; hoje e % &lt; 100)
-• Desvio %Daily vs % informado
-• Itens sem responsável e dependências circulares</a:t>
+              <a:t>A Task criada pelo time volta para a Story do cronograma; o gestor vê progresso
+e bloqueio sem cobrar status manualmente.</a:t>
             </a:r>
           </a:p>
         </p:txBody>
@@ -6226,7 +6002,7 @@
                   <a:srgbClr val="FFFFFF"/>
                 </a:solidFill>
               </a:rPr>
-              <a:t>Vantagens estratégicas para a Gestão</a:t>
+              <a:t>Principais funcionalidades</a:t>
             </a:r>
           </a:p>
         </p:txBody>
@@ -6239,8 +6015,8 @@
         </p:nvSpPr>
         <p:spPr>
           <a:xfrm>
-            <a:off x="365760" y="1417320"/>
-            <a:ext cx="5577840" cy="1600200"/>
+            <a:off x="320040" y="1417320"/>
+            <a:ext cx="2788920" cy="2377440"/>
           </a:xfrm>
           <a:prstGeom prst="rect">
             <a:avLst/>
@@ -6284,18 +6060,18 @@
         </p:nvSpPr>
         <p:spPr>
           <a:xfrm>
-            <a:off x="365760" y="1417320"/>
-            <a:ext cx="64008" cy="1600200"/>
+            <a:off x="320040" y="1417320"/>
+            <a:ext cx="2788920" cy="411480"/>
           </a:xfrm>
           <a:prstGeom prst="rect">
             <a:avLst/>
           </a:prstGeom>
           <a:solidFill>
-            <a:srgbClr val="E87B00"/>
+            <a:srgbClr val="2B579A"/>
           </a:solidFill>
           <a:ln>
             <a:solidFill>
-              <a:srgbClr val="E87B00"/>
+              <a:srgbClr val="2B579A"/>
             </a:solidFill>
           </a:ln>
         </p:spPr>
@@ -6329,8 +6105,8 @@
         </p:nvSpPr>
         <p:spPr>
           <a:xfrm>
-            <a:off x="566928" y="1527048"/>
-            <a:ext cx="5257800" cy="1417320"/>
+            <a:off x="457200" y="1463040"/>
+            <a:ext cx="2606040" cy="347472"/>
           </a:xfrm>
           <a:prstGeom prst="rect">
             <a:avLst/>
@@ -6343,42 +6119,65 @@
           </a:bodyPr>
           <a:lstStyle/>
           <a:p>
-            <a:r>
-              <a:rPr sz="1200" b="1">
-                <a:solidFill>
-                  <a:srgbClr val="1A3A6B"/>
+            <a:pPr algn="l"/>
+            <a:r>
+              <a:rPr sz="1200" b="1" i="0">
+                <a:solidFill>
+                  <a:srgbClr val="FFFFFF"/>
                 </a:solidFill>
               </a:rPr>
-              <a:t>🎯  Visibilidade real sobre os projetos de TI</a:t>
-            </a:r>
-          </a:p>
-          <a:p>
-            <a:pPr algn="l">
-              <a:spcBef>
-                <a:spcPts val="500"/>
-              </a:spcBef>
-            </a:pPr>
+              <a:t>Importação Azure DevOps</a:t>
+            </a:r>
+          </a:p>
+        </p:txBody>
+      </p:sp>
+      <p:sp>
+        <p:nvSpPr>
+          <p:cNvPr id="9" name="TextBox 8"/>
+          <p:cNvSpPr txBox="1"/>
+          <p:nvPr/>
+        </p:nvSpPr>
+        <p:spPr>
+          <a:xfrm>
+            <a:off x="457200" y="1892808"/>
+            <a:ext cx="2560320" cy="1828800"/>
+          </a:xfrm>
+          <a:prstGeom prst="rect">
+            <a:avLst/>
+          </a:prstGeom>
+          <a:noFill/>
+        </p:spPr>
+        <p:txBody>
+          <a:bodyPr wrap="square">
+            <a:spAutoFit/>
+          </a:bodyPr>
+          <a:lstStyle/>
+          <a:p>
+            <a:pPr algn="l"/>
             <a:r>
               <a:rPr sz="1050" b="0" i="0">
                 <a:solidFill>
                   <a:srgbClr val="555F6E"/>
                 </a:solidFill>
               </a:rPr>
-              <a:t>Cronograma consolidado com datas, dependências e percentual de conclusão — sem depender de relatórios manuais da equipe.</a:t>
-            </a:r>
-          </a:p>
-        </p:txBody>
-      </p:sp>
-      <p:sp>
-        <p:nvSpPr>
-          <p:cNvPr id="9" name="Rectangle 8"/>
+              <a:t>• Hierarquia Project → Epic → Feature → Story
+• Task opcional (Load Task ToDo)
+• Estimativas, datas, sprints e responsáveis
+• Predecessoras e bloqueios (tag Block)</a:t>
+            </a:r>
+          </a:p>
+        </p:txBody>
+      </p:sp>
+      <p:sp>
+        <p:nvSpPr>
+          <p:cNvPr id="10" name="Rectangle 9"/>
           <p:cNvSpPr/>
           <p:nvPr/>
         </p:nvSpPr>
         <p:spPr>
           <a:xfrm>
-            <a:off x="6217920" y="1417320"/>
-            <a:ext cx="5577840" cy="1600200"/>
+            <a:off x="3291840" y="1417320"/>
+            <a:ext cx="2788920" cy="2377440"/>
           </a:xfrm>
           <a:prstGeom prst="rect">
             <a:avLst/>
@@ -6416,24 +6215,24 @@
       </p:sp>
       <p:sp>
         <p:nvSpPr>
-          <p:cNvPr id="10" name="Rectangle 9"/>
+          <p:cNvPr id="11" name="Rectangle 10"/>
           <p:cNvSpPr/>
           <p:nvPr/>
         </p:nvSpPr>
         <p:spPr>
           <a:xfrm>
-            <a:off x="6217920" y="1417320"/>
-            <a:ext cx="64008" cy="1600200"/>
+            <a:off x="3291840" y="1417320"/>
+            <a:ext cx="2788920" cy="411480"/>
           </a:xfrm>
           <a:prstGeom prst="rect">
             <a:avLst/>
           </a:prstGeom>
           <a:solidFill>
-            <a:srgbClr val="E87B00"/>
+            <a:srgbClr val="2B579A"/>
           </a:solidFill>
           <a:ln>
             <a:solidFill>
-              <a:srgbClr val="E87B00"/>
+              <a:srgbClr val="2B579A"/>
             </a:solidFill>
           </a:ln>
         </p:spPr>
@@ -6461,14 +6260,14 @@
       </p:sp>
       <p:sp>
         <p:nvSpPr>
-          <p:cNvPr id="11" name="TextBox 10"/>
+          <p:cNvPr id="12" name="TextBox 11"/>
           <p:cNvSpPr txBox="1"/>
           <p:nvPr/>
         </p:nvSpPr>
         <p:spPr>
           <a:xfrm>
-            <a:off x="6419088" y="1527048"/>
-            <a:ext cx="5257800" cy="1417320"/>
+            <a:off x="3429000" y="1463040"/>
+            <a:ext cx="2606040" cy="347472"/>
           </a:xfrm>
           <a:prstGeom prst="rect">
             <a:avLst/>
@@ -6481,42 +6280,65 @@
           </a:bodyPr>
           <a:lstStyle/>
           <a:p>
-            <a:r>
-              <a:rPr sz="1200" b="1">
-                <a:solidFill>
-                  <a:srgbClr val="1A3A6B"/>
+            <a:pPr algn="l"/>
+            <a:r>
+              <a:rPr sz="1200" b="1" i="0">
+                <a:solidFill>
+                  <a:srgbClr val="FFFFFF"/>
                 </a:solidFill>
               </a:rPr>
-              <a:t>⚡  Zero impacto no fluxo técnico</a:t>
-            </a:r>
-          </a:p>
-          <a:p>
-            <a:pPr algn="l">
-              <a:spcBef>
-                <a:spcPts val="500"/>
-              </a:spcBef>
-            </a:pPr>
+              <a:t>Cronograma inteligente</a:t>
+            </a:r>
+          </a:p>
+        </p:txBody>
+      </p:sp>
+      <p:sp>
+        <p:nvSpPr>
+          <p:cNvPr id="13" name="TextBox 12"/>
+          <p:cNvSpPr txBox="1"/>
+          <p:nvPr/>
+        </p:nvSpPr>
+        <p:spPr>
+          <a:xfrm>
+            <a:off x="3429000" y="1892808"/>
+            <a:ext cx="2560320" cy="1828800"/>
+          </a:xfrm>
+          <a:prstGeom prst="rect">
+            <a:avLst/>
+          </a:prstGeom>
+          <a:noFill/>
+        </p:spPr>
+        <p:txBody>
+          <a:bodyPr wrap="square">
+            <a:spAutoFit/>
+          </a:bodyPr>
+          <a:lstStyle/>
+          <a:p>
+            <a:pPr algn="l"/>
             <a:r>
               <a:rPr sz="1050" b="0" i="0">
                 <a:solidFill>
                   <a:srgbClr val="555F6E"/>
                 </a:solidFill>
               </a:rPr>
-              <a:t>A equipe continua no Azure DevOps como antes. O NXProject é uma camada de leitura e planejamento — nenhuma mudança de processo necessária.</a:t>
-            </a:r>
-          </a:p>
-        </p:txBody>
-      </p:sp>
-      <p:sp>
-        <p:nvSpPr>
-          <p:cNvPr id="12" name="Rectangle 11"/>
+              <a:t>• Cascata automática por predecessoras
+• Predecessora virtual por recurso
+• Calendário com feriados e horas úteis
+• Coluna %Daily: ritmo esperado até hoje</a:t>
+            </a:r>
+          </a:p>
+        </p:txBody>
+      </p:sp>
+      <p:sp>
+        <p:nvSpPr>
+          <p:cNvPr id="14" name="Rectangle 13"/>
           <p:cNvSpPr/>
           <p:nvPr/>
         </p:nvSpPr>
         <p:spPr>
           <a:xfrm>
-            <a:off x="365760" y="3154680"/>
-            <a:ext cx="5577840" cy="1600200"/>
+            <a:off x="6263640" y="1417320"/>
+            <a:ext cx="2788920" cy="2377440"/>
           </a:xfrm>
           <a:prstGeom prst="rect">
             <a:avLst/>
@@ -6554,24 +6376,24 @@
       </p:sp>
       <p:sp>
         <p:nvSpPr>
-          <p:cNvPr id="13" name="Rectangle 12"/>
+          <p:cNvPr id="15" name="Rectangle 14"/>
           <p:cNvSpPr/>
           <p:nvPr/>
         </p:nvSpPr>
         <p:spPr>
           <a:xfrm>
-            <a:off x="365760" y="3154680"/>
-            <a:ext cx="64008" cy="1600200"/>
+            <a:off x="6263640" y="1417320"/>
+            <a:ext cx="2788920" cy="411480"/>
           </a:xfrm>
           <a:prstGeom prst="rect">
             <a:avLst/>
           </a:prstGeom>
           <a:solidFill>
-            <a:srgbClr val="E87B00"/>
+            <a:srgbClr val="2B579A"/>
           </a:solidFill>
           <a:ln>
             <a:solidFill>
-              <a:srgbClr val="E87B00"/>
+              <a:srgbClr val="2B579A"/>
             </a:solidFill>
           </a:ln>
         </p:spPr>
@@ -6599,14 +6421,14 @@
       </p:sp>
       <p:sp>
         <p:nvSpPr>
-          <p:cNvPr id="14" name="TextBox 13"/>
+          <p:cNvPr id="16" name="TextBox 15"/>
           <p:cNvSpPr txBox="1"/>
           <p:nvPr/>
         </p:nvSpPr>
         <p:spPr>
           <a:xfrm>
-            <a:off x="566928" y="3264408"/>
-            <a:ext cx="5257800" cy="1417320"/>
+            <a:off x="6400800" y="1463040"/>
+            <a:ext cx="2606040" cy="347472"/>
           </a:xfrm>
           <a:prstGeom prst="rect">
             <a:avLst/>
@@ -6619,42 +6441,65 @@
           </a:bodyPr>
           <a:lstStyle/>
           <a:p>
-            <a:r>
-              <a:rPr sz="1200" b="1">
-                <a:solidFill>
-                  <a:srgbClr val="1A3A6B"/>
+            <a:pPr algn="l"/>
+            <a:r>
+              <a:rPr sz="1200" b="1" i="0">
+                <a:solidFill>
+                  <a:srgbClr val="FFFFFF"/>
                 </a:solidFill>
               </a:rPr>
-              <a:t>💰  Redução de retrabalho e custos ocultos</a:t>
-            </a:r>
-          </a:p>
-          <a:p>
-            <a:pPr algn="l">
-              <a:spcBef>
-                <a:spcPts val="500"/>
-              </a:spcBef>
-            </a:pPr>
+              <a:t>Gráfico Gantt</a:t>
+            </a:r>
+          </a:p>
+        </p:txBody>
+      </p:sp>
+      <p:sp>
+        <p:nvSpPr>
+          <p:cNvPr id="17" name="TextBox 16"/>
+          <p:cNvSpPr txBox="1"/>
+          <p:nvPr/>
+        </p:nvSpPr>
+        <p:spPr>
+          <a:xfrm>
+            <a:off x="6400800" y="1892808"/>
+            <a:ext cx="2560320" cy="1828800"/>
+          </a:xfrm>
+          <a:prstGeom prst="rect">
+            <a:avLst/>
+          </a:prstGeom>
+          <a:noFill/>
+        </p:spPr>
+        <p:txBody>
+          <a:bodyPr wrap="square">
+            <a:spAutoFit/>
+          </a:bodyPr>
+          <a:lstStyle/>
+          <a:p>
+            <a:pPr algn="l"/>
             <a:r>
               <a:rPr sz="1050" b="0" i="0">
                 <a:solidFill>
                   <a:srgbClr val="555F6E"/>
                 </a:solidFill>
               </a:rPr>
-              <a:t>Elimina planilhas paralelas, reuniões de status demoradas e o custo de atrasos não detectados a tempo.</a:t>
-            </a:r>
-          </a:p>
-        </p:txBody>
-      </p:sp>
-      <p:sp>
-        <p:nvSpPr>
-          <p:cNvPr id="15" name="Rectangle 14"/>
+              <a:t>• Barras, marcos e setas de dependência
+• Caminho crítico (CPM) e linha de base
+• Zoom: Dia, Semana, Sprint, Mês, Trimestre
+• Arrastar para replanejar visualmente</a:t>
+            </a:r>
+          </a:p>
+        </p:txBody>
+      </p:sp>
+      <p:sp>
+        <p:nvSpPr>
+          <p:cNvPr id="18" name="Rectangle 17"/>
           <p:cNvSpPr/>
           <p:nvPr/>
         </p:nvSpPr>
         <p:spPr>
           <a:xfrm>
-            <a:off x="6217920" y="3154680"/>
-            <a:ext cx="5577840" cy="1600200"/>
+            <a:off x="9235440" y="1417320"/>
+            <a:ext cx="2788920" cy="2377440"/>
           </a:xfrm>
           <a:prstGeom prst="rect">
             <a:avLst/>
@@ -6692,24 +6537,24 @@
       </p:sp>
       <p:sp>
         <p:nvSpPr>
-          <p:cNvPr id="16" name="Rectangle 15"/>
+          <p:cNvPr id="19" name="Rectangle 18"/>
           <p:cNvSpPr/>
           <p:nvPr/>
         </p:nvSpPr>
         <p:spPr>
           <a:xfrm>
-            <a:off x="6217920" y="3154680"/>
-            <a:ext cx="64008" cy="1600200"/>
+            <a:off x="9235440" y="1417320"/>
+            <a:ext cx="2788920" cy="411480"/>
           </a:xfrm>
           <a:prstGeom prst="rect">
             <a:avLst/>
           </a:prstGeom>
           <a:solidFill>
-            <a:srgbClr val="E87B00"/>
+            <a:srgbClr val="2B579A"/>
           </a:solidFill>
           <a:ln>
             <a:solidFill>
-              <a:srgbClr val="E87B00"/>
+              <a:srgbClr val="2B579A"/>
             </a:solidFill>
           </a:ln>
         </p:spPr>
@@ -6737,14 +6582,14 @@
       </p:sp>
       <p:sp>
         <p:nvSpPr>
-          <p:cNvPr id="17" name="TextBox 16"/>
+          <p:cNvPr id="20" name="TextBox 19"/>
           <p:cNvSpPr txBox="1"/>
           <p:nvPr/>
         </p:nvSpPr>
         <p:spPr>
           <a:xfrm>
-            <a:off x="6419088" y="3264408"/>
-            <a:ext cx="5257800" cy="1417320"/>
+            <a:off x="9372600" y="1463040"/>
+            <a:ext cx="2606040" cy="347472"/>
           </a:xfrm>
           <a:prstGeom prst="rect">
             <a:avLst/>
@@ -6757,42 +6602,65 @@
           </a:bodyPr>
           <a:lstStyle/>
           <a:p>
-            <a:r>
-              <a:rPr sz="1200" b="1">
-                <a:solidFill>
-                  <a:srgbClr val="1A3A6B"/>
+            <a:pPr algn="l"/>
+            <a:r>
+              <a:rPr sz="1200" b="1" i="0">
+                <a:solidFill>
+                  <a:srgbClr val="FFFFFF"/>
                 </a:solidFill>
               </a:rPr>
-              <a:t>📈  Decisão baseada em dados</a:t>
-            </a:r>
-          </a:p>
-          <a:p>
-            <a:pPr algn="l">
-              <a:spcBef>
-                <a:spcPts val="500"/>
-              </a:spcBef>
-            </a:pPr>
+              <a:t>TaskBoard</a:t>
+            </a:r>
+          </a:p>
+        </p:txBody>
+      </p:sp>
+      <p:sp>
+        <p:nvSpPr>
+          <p:cNvPr id="21" name="TextBox 20"/>
+          <p:cNvSpPr txBox="1"/>
+          <p:nvPr/>
+        </p:nvSpPr>
+        <p:spPr>
+          <a:xfrm>
+            <a:off x="9372600" y="1892808"/>
+            <a:ext cx="2560320" cy="1828800"/>
+          </a:xfrm>
+          <a:prstGeom prst="rect">
+            <a:avLst/>
+          </a:prstGeom>
+          <a:noFill/>
+        </p:spPr>
+        <p:txBody>
+          <a:bodyPr wrap="square">
+            <a:spAutoFit/>
+          </a:bodyPr>
+          <a:lstStyle/>
+          <a:p>
+            <a:pPr algn="l"/>
             <a:r>
               <a:rPr sz="1050" b="0" i="0">
                 <a:solidFill>
                   <a:srgbClr val="555F6E"/>
                 </a:solidFill>
               </a:rPr>
-              <a:t>Health Check automático, alocação de recursos e alertas proativos de atraso dão à gestão informação precisa para tomar decisões rápidas.</a:t>
-            </a:r>
-          </a:p>
-        </p:txBody>
-      </p:sp>
-      <p:sp>
-        <p:nvSpPr>
-          <p:cNvPr id="18" name="Rectangle 17"/>
+              <a:t>• Visões Projeto &amp; Story e Pessoa &amp; Task
+• Arrastar muda o estado; grava em lote
+• Doing/Done e limite de WIP por pessoa
+• Alerta de Story fora de sincronia</a:t>
+            </a:r>
+          </a:p>
+        </p:txBody>
+      </p:sp>
+      <p:sp>
+        <p:nvSpPr>
+          <p:cNvPr id="22" name="Rectangle 21"/>
           <p:cNvSpPr/>
           <p:nvPr/>
         </p:nvSpPr>
         <p:spPr>
           <a:xfrm>
-            <a:off x="365760" y="4892040"/>
-            <a:ext cx="5577840" cy="1600200"/>
+            <a:off x="320040" y="4023360"/>
+            <a:ext cx="2788920" cy="2377440"/>
           </a:xfrm>
           <a:prstGeom prst="rect">
             <a:avLst/>
@@ -6830,24 +6698,24 @@
       </p:sp>
       <p:sp>
         <p:nvSpPr>
-          <p:cNvPr id="19" name="Rectangle 18"/>
+          <p:cNvPr id="23" name="Rectangle 22"/>
           <p:cNvSpPr/>
           <p:nvPr/>
         </p:nvSpPr>
         <p:spPr>
           <a:xfrm>
-            <a:off x="365760" y="4892040"/>
-            <a:ext cx="64008" cy="1600200"/>
+            <a:off x="320040" y="4023360"/>
+            <a:ext cx="2788920" cy="411480"/>
           </a:xfrm>
           <a:prstGeom prst="rect">
             <a:avLst/>
           </a:prstGeom>
           <a:solidFill>
-            <a:srgbClr val="E87B00"/>
+            <a:srgbClr val="2B579A"/>
           </a:solidFill>
           <a:ln>
             <a:solidFill>
-              <a:srgbClr val="E87B00"/>
+              <a:srgbClr val="2B579A"/>
             </a:solidFill>
           </a:ln>
         </p:spPr>
@@ -6875,14 +6743,14 @@
       </p:sp>
       <p:sp>
         <p:nvSpPr>
-          <p:cNvPr id="20" name="TextBox 19"/>
+          <p:cNvPr id="24" name="TextBox 23"/>
           <p:cNvSpPr txBox="1"/>
           <p:nvPr/>
         </p:nvSpPr>
         <p:spPr>
           <a:xfrm>
-            <a:off x="566928" y="5001768"/>
-            <a:ext cx="5257800" cy="1417320"/>
+            <a:off x="457200" y="4069080"/>
+            <a:ext cx="2606040" cy="347472"/>
           </a:xfrm>
           <a:prstGeom prst="rect">
             <a:avLst/>
@@ -6895,42 +6763,65 @@
           </a:bodyPr>
           <a:lstStyle/>
           <a:p>
-            <a:r>
-              <a:rPr sz="1200" b="1">
-                <a:solidFill>
-                  <a:srgbClr val="1A3A6B"/>
+            <a:pPr algn="l"/>
+            <a:r>
+              <a:rPr sz="1200" b="1" i="0">
+                <a:solidFill>
+                  <a:srgbClr val="FFFFFF"/>
                 </a:solidFill>
               </a:rPr>
-              <a:t>🔒  Segurança e controle</a:t>
-            </a:r>
-          </a:p>
-          <a:p>
-            <a:pPr algn="l">
-              <a:spcBef>
-                <a:spcPts val="500"/>
-              </a:spcBef>
-            </a:pPr>
+              <a:t>Task Plan (Excel)</a:t>
+            </a:r>
+          </a:p>
+        </p:txBody>
+      </p:sp>
+      <p:sp>
+        <p:nvSpPr>
+          <p:cNvPr id="25" name="TextBox 24"/>
+          <p:cNvSpPr txBox="1"/>
+          <p:nvPr/>
+        </p:nvSpPr>
+        <p:spPr>
+          <a:xfrm>
+            <a:off x="457200" y="4498848"/>
+            <a:ext cx="2560320" cy="1828800"/>
+          </a:xfrm>
+          <a:prstGeom prst="rect">
+            <a:avLst/>
+          </a:prstGeom>
+          <a:noFill/>
+        </p:spPr>
+        <p:txBody>
+          <a:bodyPr wrap="square">
+            <a:spAutoFit/>
+          </a:bodyPr>
+          <a:lstStyle/>
+          <a:p>
+            <a:pPr algn="l"/>
             <a:r>
               <a:rPr sz="1050" b="0" i="0">
                 <a:solidFill>
                   <a:srgbClr val="555F6E"/>
                 </a:solidFill>
               </a:rPr>
-              <a:t>Credenciais Azure DevOps protegidas por DPAPI (criptografia Windows por usuário). Dados do projeto em arquivo local — sem cloud obrigatório.</a:t>
-            </a:r>
-          </a:p>
-        </p:txBody>
-      </p:sp>
-      <p:sp>
-        <p:nvSpPr>
-          <p:cNvPr id="21" name="Rectangle 20"/>
+              <a:t>• Decompõe a Story em Tasks na planilha
+• Sugestão por IA e revisão do Tech Lead
+• Aplica no cronograma e sincroniza
+• Backup automático a cada gravação</a:t>
+            </a:r>
+          </a:p>
+        </p:txBody>
+      </p:sp>
+      <p:sp>
+        <p:nvSpPr>
+          <p:cNvPr id="26" name="Rectangle 25"/>
           <p:cNvSpPr/>
           <p:nvPr/>
         </p:nvSpPr>
         <p:spPr>
           <a:xfrm>
-            <a:off x="6217920" y="4892040"/>
-            <a:ext cx="5577840" cy="1600200"/>
+            <a:off x="3291840" y="4023360"/>
+            <a:ext cx="2788920" cy="2377440"/>
           </a:xfrm>
           <a:prstGeom prst="rect">
             <a:avLst/>
@@ -6968,24 +6859,24 @@
       </p:sp>
       <p:sp>
         <p:nvSpPr>
-          <p:cNvPr id="22" name="Rectangle 21"/>
+          <p:cNvPr id="27" name="Rectangle 26"/>
           <p:cNvSpPr/>
           <p:nvPr/>
         </p:nvSpPr>
         <p:spPr>
           <a:xfrm>
-            <a:off x="6217920" y="4892040"/>
-            <a:ext cx="64008" cy="1600200"/>
+            <a:off x="3291840" y="4023360"/>
+            <a:ext cx="2788920" cy="411480"/>
           </a:xfrm>
           <a:prstGeom prst="rect">
             <a:avLst/>
           </a:prstGeom>
           <a:solidFill>
-            <a:srgbClr val="E87B00"/>
+            <a:srgbClr val="2B579A"/>
           </a:solidFill>
           <a:ln>
             <a:solidFill>
-              <a:srgbClr val="E87B00"/>
+              <a:srgbClr val="2B579A"/>
             </a:solidFill>
           </a:ln>
         </p:spPr>
@@ -7013,14 +6904,14 @@
       </p:sp>
       <p:sp>
         <p:nvSpPr>
-          <p:cNvPr id="23" name="TextBox 22"/>
+          <p:cNvPr id="28" name="TextBox 27"/>
           <p:cNvSpPr txBox="1"/>
           <p:nvPr/>
         </p:nvSpPr>
         <p:spPr>
           <a:xfrm>
-            <a:off x="6419088" y="5001768"/>
-            <a:ext cx="5257800" cy="1417320"/>
+            <a:off x="3429000" y="4069080"/>
+            <a:ext cx="2606040" cy="347472"/>
           </a:xfrm>
           <a:prstGeom prst="rect">
             <a:avLst/>
@@ -7033,28 +6924,372 @@
           </a:bodyPr>
           <a:lstStyle/>
           <a:p>
-            <a:r>
-              <a:rPr sz="1200" b="1">
-                <a:solidFill>
-                  <a:srgbClr val="1A3A6B"/>
+            <a:pPr algn="l"/>
+            <a:r>
+              <a:rPr sz="1200" b="1" i="0">
+                <a:solidFill>
+                  <a:srgbClr val="FFFFFF"/>
                 </a:solidFill>
               </a:rPr>
-              <a:t>📦  Implantação simples</a:t>
-            </a:r>
-          </a:p>
-          <a:p>
-            <a:pPr algn="l">
-              <a:spcBef>
-                <a:spcPts val="500"/>
-              </a:spcBef>
-            </a:pPr>
+              <a:t>Recursos e custos</a:t>
+            </a:r>
+          </a:p>
+        </p:txBody>
+      </p:sp>
+      <p:sp>
+        <p:nvSpPr>
+          <p:cNvPr id="29" name="TextBox 28"/>
+          <p:cNvSpPr txBox="1"/>
+          <p:nvPr/>
+        </p:nvSpPr>
+        <p:spPr>
+          <a:xfrm>
+            <a:off x="3429000" y="4498848"/>
+            <a:ext cx="2560320" cy="1828800"/>
+          </a:xfrm>
+          <a:prstGeom prst="rect">
+            <a:avLst/>
+          </a:prstGeom>
+          <a:noFill/>
+        </p:spPr>
+        <p:txBody>
+          <a:bodyPr wrap="square">
+            <a:spAutoFit/>
+          </a:bodyPr>
+          <a:lstStyle/>
+          <a:p>
+            <a:pPr algn="l"/>
             <a:r>
               <a:rPr sz="1050" b="0" i="0">
                 <a:solidFill>
                   <a:srgbClr val="555F6E"/>
                 </a:solidFill>
               </a:rPr>
-              <a:t>Instalação standalone (zero dependências externas), pronto para uso em minutos. Sem infraestrutura adicional de servidor.</a:t>
+              <a:t>• Alocação por pessoa e sprint
+• Mapa de alocação por projeto e mês
+• Custo por recurso (hora ou mensal)
+• Alerta de sobrecarga (&gt;100%)</a:t>
+            </a:r>
+          </a:p>
+        </p:txBody>
+      </p:sp>
+      <p:sp>
+        <p:nvSpPr>
+          <p:cNvPr id="30" name="Rectangle 29"/>
+          <p:cNvSpPr/>
+          <p:nvPr/>
+        </p:nvSpPr>
+        <p:spPr>
+          <a:xfrm>
+            <a:off x="6263640" y="4023360"/>
+            <a:ext cx="2788920" cy="2377440"/>
+          </a:xfrm>
+          <a:prstGeom prst="rect">
+            <a:avLst/>
+          </a:prstGeom>
+          <a:solidFill>
+            <a:srgbClr val="FFFFFF"/>
+          </a:solidFill>
+          <a:ln>
+            <a:solidFill>
+              <a:srgbClr val="FFFFFF"/>
+            </a:solidFill>
+          </a:ln>
+        </p:spPr>
+        <p:style>
+          <a:lnRef idx="1">
+            <a:schemeClr val="accent1"/>
+          </a:lnRef>
+          <a:fillRef idx="3">
+            <a:schemeClr val="accent1"/>
+          </a:fillRef>
+          <a:effectRef idx="2">
+            <a:schemeClr val="accent1"/>
+          </a:effectRef>
+          <a:fontRef idx="minor">
+            <a:schemeClr val="lt1"/>
+          </a:fontRef>
+        </p:style>
+        <p:txBody>
+          <a:bodyPr rtlCol="0" anchor="ctr"/>
+          <a:lstStyle/>
+          <a:p>
+            <a:pPr algn="ctr"/>
+          </a:p>
+        </p:txBody>
+      </p:sp>
+      <p:sp>
+        <p:nvSpPr>
+          <p:cNvPr id="31" name="Rectangle 30"/>
+          <p:cNvSpPr/>
+          <p:nvPr/>
+        </p:nvSpPr>
+        <p:spPr>
+          <a:xfrm>
+            <a:off x="6263640" y="4023360"/>
+            <a:ext cx="2788920" cy="411480"/>
+          </a:xfrm>
+          <a:prstGeom prst="rect">
+            <a:avLst/>
+          </a:prstGeom>
+          <a:solidFill>
+            <a:srgbClr val="2B579A"/>
+          </a:solidFill>
+          <a:ln>
+            <a:solidFill>
+              <a:srgbClr val="2B579A"/>
+            </a:solidFill>
+          </a:ln>
+        </p:spPr>
+        <p:style>
+          <a:lnRef idx="1">
+            <a:schemeClr val="accent1"/>
+          </a:lnRef>
+          <a:fillRef idx="3">
+            <a:schemeClr val="accent1"/>
+          </a:fillRef>
+          <a:effectRef idx="2">
+            <a:schemeClr val="accent1"/>
+          </a:effectRef>
+          <a:fontRef idx="minor">
+            <a:schemeClr val="lt1"/>
+          </a:fontRef>
+        </p:style>
+        <p:txBody>
+          <a:bodyPr rtlCol="0" anchor="ctr"/>
+          <a:lstStyle/>
+          <a:p>
+            <a:pPr algn="ctr"/>
+          </a:p>
+        </p:txBody>
+      </p:sp>
+      <p:sp>
+        <p:nvSpPr>
+          <p:cNvPr id="32" name="TextBox 31"/>
+          <p:cNvSpPr txBox="1"/>
+          <p:nvPr/>
+        </p:nvSpPr>
+        <p:spPr>
+          <a:xfrm>
+            <a:off x="6400800" y="4069080"/>
+            <a:ext cx="2606040" cy="347472"/>
+          </a:xfrm>
+          <a:prstGeom prst="rect">
+            <a:avLst/>
+          </a:prstGeom>
+          <a:noFill/>
+        </p:spPr>
+        <p:txBody>
+          <a:bodyPr wrap="square">
+            <a:spAutoFit/>
+          </a:bodyPr>
+          <a:lstStyle/>
+          <a:p>
+            <a:pPr algn="l"/>
+            <a:r>
+              <a:rPr sz="1200" b="1" i="0">
+                <a:solidFill>
+                  <a:srgbClr val="FFFFFF"/>
+                </a:solidFill>
+              </a:rPr>
+              <a:t>Sincronização bidirecional</a:t>
+            </a:r>
+          </a:p>
+        </p:txBody>
+      </p:sp>
+      <p:sp>
+        <p:nvSpPr>
+          <p:cNvPr id="33" name="TextBox 32"/>
+          <p:cNvSpPr txBox="1"/>
+          <p:nvPr/>
+        </p:nvSpPr>
+        <p:spPr>
+          <a:xfrm>
+            <a:off x="6400800" y="4498848"/>
+            <a:ext cx="2560320" cy="1828800"/>
+          </a:xfrm>
+          <a:prstGeom prst="rect">
+            <a:avLst/>
+          </a:prstGeom>
+          <a:noFill/>
+        </p:spPr>
+        <p:txBody>
+          <a:bodyPr wrap="square">
+            <a:spAutoFit/>
+          </a:bodyPr>
+          <a:lstStyle/>
+          <a:p>
+            <a:pPr algn="l"/>
+            <a:r>
+              <a:rPr sz="1050" b="0" i="0">
+                <a:solidFill>
+                  <a:srgbClr val="555F6E"/>
+                </a:solidFill>
+              </a:rPr>
+              <a:t>• Datas, horas, estado, sprint, tags e predecessoras
+• Cria work items novos no DevOps
+• Controle de concorrência entre usuários
+• Grupo administrador (Adm_NX) do projeto</a:t>
+            </a:r>
+          </a:p>
+        </p:txBody>
+      </p:sp>
+      <p:sp>
+        <p:nvSpPr>
+          <p:cNvPr id="34" name="Rectangle 33"/>
+          <p:cNvSpPr/>
+          <p:nvPr/>
+        </p:nvSpPr>
+        <p:spPr>
+          <a:xfrm>
+            <a:off x="9235440" y="4023360"/>
+            <a:ext cx="2788920" cy="2377440"/>
+          </a:xfrm>
+          <a:prstGeom prst="rect">
+            <a:avLst/>
+          </a:prstGeom>
+          <a:solidFill>
+            <a:srgbClr val="FFFFFF"/>
+          </a:solidFill>
+          <a:ln>
+            <a:solidFill>
+              <a:srgbClr val="FFFFFF"/>
+            </a:solidFill>
+          </a:ln>
+        </p:spPr>
+        <p:style>
+          <a:lnRef idx="1">
+            <a:schemeClr val="accent1"/>
+          </a:lnRef>
+          <a:fillRef idx="3">
+            <a:schemeClr val="accent1"/>
+          </a:fillRef>
+          <a:effectRef idx="2">
+            <a:schemeClr val="accent1"/>
+          </a:effectRef>
+          <a:fontRef idx="minor">
+            <a:schemeClr val="lt1"/>
+          </a:fontRef>
+        </p:style>
+        <p:txBody>
+          <a:bodyPr rtlCol="0" anchor="ctr"/>
+          <a:lstStyle/>
+          <a:p>
+            <a:pPr algn="ctr"/>
+          </a:p>
+        </p:txBody>
+      </p:sp>
+      <p:sp>
+        <p:nvSpPr>
+          <p:cNvPr id="35" name="Rectangle 34"/>
+          <p:cNvSpPr/>
+          <p:nvPr/>
+        </p:nvSpPr>
+        <p:spPr>
+          <a:xfrm>
+            <a:off x="9235440" y="4023360"/>
+            <a:ext cx="2788920" cy="411480"/>
+          </a:xfrm>
+          <a:prstGeom prst="rect">
+            <a:avLst/>
+          </a:prstGeom>
+          <a:solidFill>
+            <a:srgbClr val="2B579A"/>
+          </a:solidFill>
+          <a:ln>
+            <a:solidFill>
+              <a:srgbClr val="2B579A"/>
+            </a:solidFill>
+          </a:ln>
+        </p:spPr>
+        <p:style>
+          <a:lnRef idx="1">
+            <a:schemeClr val="accent1"/>
+          </a:lnRef>
+          <a:fillRef idx="3">
+            <a:schemeClr val="accent1"/>
+          </a:fillRef>
+          <a:effectRef idx="2">
+            <a:schemeClr val="accent1"/>
+          </a:effectRef>
+          <a:fontRef idx="minor">
+            <a:schemeClr val="lt1"/>
+          </a:fontRef>
+        </p:style>
+        <p:txBody>
+          <a:bodyPr rtlCol="0" anchor="ctr"/>
+          <a:lstStyle/>
+          <a:p>
+            <a:pPr algn="ctr"/>
+          </a:p>
+        </p:txBody>
+      </p:sp>
+      <p:sp>
+        <p:nvSpPr>
+          <p:cNvPr id="36" name="TextBox 35"/>
+          <p:cNvSpPr txBox="1"/>
+          <p:nvPr/>
+        </p:nvSpPr>
+        <p:spPr>
+          <a:xfrm>
+            <a:off x="9372600" y="4069080"/>
+            <a:ext cx="2606040" cy="347472"/>
+          </a:xfrm>
+          <a:prstGeom prst="rect">
+            <a:avLst/>
+          </a:prstGeom>
+          <a:noFill/>
+        </p:spPr>
+        <p:txBody>
+          <a:bodyPr wrap="square">
+            <a:spAutoFit/>
+          </a:bodyPr>
+          <a:lstStyle/>
+          <a:p>
+            <a:pPr algn="l"/>
+            <a:r>
+              <a:rPr sz="1200" b="1" i="0">
+                <a:solidFill>
+                  <a:srgbClr val="FFFFFF"/>
+                </a:solidFill>
+              </a:rPr>
+              <a:t>Health Check</a:t>
+            </a:r>
+          </a:p>
+        </p:txBody>
+      </p:sp>
+      <p:sp>
+        <p:nvSpPr>
+          <p:cNvPr id="37" name="TextBox 36"/>
+          <p:cNvSpPr txBox="1"/>
+          <p:nvPr/>
+        </p:nvSpPr>
+        <p:spPr>
+          <a:xfrm>
+            <a:off x="9372600" y="4498848"/>
+            <a:ext cx="2560320" cy="1828800"/>
+          </a:xfrm>
+          <a:prstGeom prst="rect">
+            <a:avLst/>
+          </a:prstGeom>
+          <a:noFill/>
+        </p:spPr>
+        <p:txBody>
+          <a:bodyPr wrap="square">
+            <a:spAutoFit/>
+          </a:bodyPr>
+          <a:lstStyle/>
+          <a:p>
+            <a:pPr algn="l"/>
+            <a:r>
+              <a:rPr sz="1050" b="0" i="0">
+                <a:solidFill>
+                  <a:srgbClr val="555F6E"/>
+                </a:solidFill>
+              </a:rPr>
+              <a:t>• Atividades em atraso (Fim &lt; hoje e % &lt; 100)
+• Desvio %Daily vs % informado
+• Itens sem responsável e dependências circulares</a:t>
             </a:r>
           </a:p>
         </p:txBody>
@@ -7241,7 +7476,7 @@
                   <a:srgbClr val="FFFFFF"/>
                 </a:solidFill>
               </a:rPr>
-              <a:t>Como funciona — fluxo de trabalho</a:t>
+              <a:t>Vantagens estratégicas para a Gestão</a:t>
             </a:r>
           </a:p>
         </p:txBody>
@@ -7254,18 +7489,18 @@
         </p:nvSpPr>
         <p:spPr>
           <a:xfrm>
-            <a:off x="333756" y="2011680"/>
-            <a:ext cx="2011680" cy="3474720"/>
+            <a:off x="365760" y="1417320"/>
+            <a:ext cx="5577840" cy="1600200"/>
           </a:xfrm>
           <a:prstGeom prst="rect">
             <a:avLst/>
           </a:prstGeom>
           <a:solidFill>
-            <a:srgbClr val="2B579A"/>
+            <a:srgbClr val="FFFFFF"/>
           </a:solidFill>
           <a:ln>
             <a:solidFill>
-              <a:srgbClr val="2B579A"/>
+              <a:srgbClr val="FFFFFF"/>
             </a:solidFill>
           </a:ln>
         </p:spPr>
@@ -7299,8 +7534,8 @@
         </p:nvSpPr>
         <p:spPr>
           <a:xfrm>
-            <a:off x="1019556" y="2176272"/>
-            <a:ext cx="640080" cy="640080"/>
+            <a:off x="365760" y="1417320"/>
+            <a:ext cx="64008" cy="1600200"/>
           </a:xfrm>
           <a:prstGeom prst="rect">
             <a:avLst/>
@@ -7344,8 +7579,8 @@
         </p:nvSpPr>
         <p:spPr>
           <a:xfrm>
-            <a:off x="1019556" y="2176272"/>
-            <a:ext cx="640080" cy="640080"/>
+            <a:off x="566928" y="1527048"/>
+            <a:ext cx="5257800" cy="1417320"/>
           </a:xfrm>
           <a:prstGeom prst="rect">
             <a:avLst/>
@@ -7358,142 +7593,52 @@
           </a:bodyPr>
           <a:lstStyle/>
           <a:p>
-            <a:pPr algn="ctr"/>
-            <a:r>
-              <a:rPr sz="2000" b="1" i="0">
-                <a:solidFill>
-                  <a:srgbClr val="FFFFFF"/>
+            <a:r>
+              <a:rPr sz="1200" b="1">
+                <a:solidFill>
+                  <a:srgbClr val="1A3A6B"/>
                 </a:solidFill>
               </a:rPr>
-              <a:t>1</a:t>
-            </a:r>
-          </a:p>
-        </p:txBody>
-      </p:sp>
-      <p:sp>
-        <p:nvSpPr>
-          <p:cNvPr id="9" name="TextBox 8"/>
-          <p:cNvSpPr txBox="1"/>
-          <p:nvPr/>
-        </p:nvSpPr>
-        <p:spPr>
-          <a:xfrm>
-            <a:off x="425196" y="3017520"/>
-            <a:ext cx="1828800" cy="548640"/>
-          </a:xfrm>
-          <a:prstGeom prst="rect">
-            <a:avLst/>
-          </a:prstGeom>
-          <a:noFill/>
-        </p:spPr>
-        <p:txBody>
-          <a:bodyPr wrap="square">
-            <a:spAutoFit/>
-          </a:bodyPr>
-          <a:lstStyle/>
-          <a:p>
-            <a:pPr algn="ctr"/>
-            <a:r>
-              <a:rPr sz="1400" b="1" i="0">
-                <a:solidFill>
-                  <a:srgbClr val="FFFFFF"/>
+              <a:t>🎯  Visibilidade real sobre os projetos de TI</a:t>
+            </a:r>
+          </a:p>
+          <a:p>
+            <a:pPr algn="l">
+              <a:spcBef>
+                <a:spcPts val="500"/>
+              </a:spcBef>
+            </a:pPr>
+            <a:r>
+              <a:rPr sz="1050" b="0" i="0">
+                <a:solidFill>
+                  <a:srgbClr val="555F6E"/>
                 </a:solidFill>
               </a:rPr>
-              <a:t>Importar</a:t>
-            </a:r>
-          </a:p>
-        </p:txBody>
-      </p:sp>
-      <p:sp>
-        <p:nvSpPr>
-          <p:cNvPr id="10" name="TextBox 9"/>
-          <p:cNvSpPr txBox="1"/>
-          <p:nvPr/>
-        </p:nvSpPr>
-        <p:spPr>
-          <a:xfrm>
-            <a:off x="425196" y="3703320"/>
-            <a:ext cx="1828800" cy="1645920"/>
-          </a:xfrm>
-          <a:prstGeom prst="rect">
-            <a:avLst/>
-          </a:prstGeom>
-          <a:noFill/>
-        </p:spPr>
-        <p:txBody>
-          <a:bodyPr wrap="square">
-            <a:spAutoFit/>
-          </a:bodyPr>
-          <a:lstStyle/>
-          <a:p>
-            <a:pPr algn="ctr"/>
-            <a:r>
-              <a:rPr sz="1100" b="0" i="0">
-                <a:solidFill>
-                  <a:srgbClr val="D6E4F7"/>
-                </a:solidFill>
-              </a:rPr>
-              <a:t>Conecte ao Azure DevOps
-e importe a hierarquia
-de work items</a:t>
-            </a:r>
-          </a:p>
-        </p:txBody>
-      </p:sp>
-      <p:sp>
-        <p:nvSpPr>
-          <p:cNvPr id="11" name="TextBox 10"/>
-          <p:cNvSpPr txBox="1"/>
-          <p:nvPr/>
-        </p:nvSpPr>
-        <p:spPr>
-          <a:xfrm>
-            <a:off x="2436876" y="3611880"/>
-            <a:ext cx="274320" cy="274320"/>
-          </a:xfrm>
-          <a:prstGeom prst="rect">
-            <a:avLst/>
-          </a:prstGeom>
-          <a:noFill/>
-        </p:spPr>
-        <p:txBody>
-          <a:bodyPr wrap="square">
-            <a:spAutoFit/>
-          </a:bodyPr>
-          <a:lstStyle/>
-          <a:p>
-            <a:pPr algn="ctr"/>
-            <a:r>
-              <a:rPr sz="2200" b="1" i="0">
-                <a:solidFill>
-                  <a:srgbClr val="1A3A6B"/>
-                </a:solidFill>
-              </a:rPr>
-              <a:t>→</a:t>
-            </a:r>
-          </a:p>
-        </p:txBody>
-      </p:sp>
-      <p:sp>
-        <p:nvSpPr>
-          <p:cNvPr id="12" name="Rectangle 11"/>
+              <a:t>Cronograma consolidado com datas, dependências e percentual de conclusão — sem depender de relatórios manuais da equipe.</a:t>
+            </a:r>
+          </a:p>
+        </p:txBody>
+      </p:sp>
+      <p:sp>
+        <p:nvSpPr>
+          <p:cNvPr id="9" name="Rectangle 8"/>
           <p:cNvSpPr/>
           <p:nvPr/>
         </p:nvSpPr>
         <p:spPr>
           <a:xfrm>
-            <a:off x="2711196" y="2011680"/>
-            <a:ext cx="2011680" cy="3474720"/>
+            <a:off x="6217920" y="1417320"/>
+            <a:ext cx="5577840" cy="1600200"/>
           </a:xfrm>
           <a:prstGeom prst="rect">
             <a:avLst/>
           </a:prstGeom>
           <a:solidFill>
-            <a:srgbClr val="2B579A"/>
+            <a:srgbClr val="FFFFFF"/>
           </a:solidFill>
           <a:ln>
             <a:solidFill>
-              <a:srgbClr val="2B579A"/>
+              <a:srgbClr val="FFFFFF"/>
             </a:solidFill>
           </a:ln>
         </p:spPr>
@@ -7521,14 +7666,14 @@
       </p:sp>
       <p:sp>
         <p:nvSpPr>
-          <p:cNvPr id="13" name="Rectangle 12"/>
+          <p:cNvPr id="10" name="Rectangle 9"/>
           <p:cNvSpPr/>
           <p:nvPr/>
         </p:nvSpPr>
         <p:spPr>
           <a:xfrm>
-            <a:off x="3396996" y="2176272"/>
-            <a:ext cx="640080" cy="640080"/>
+            <a:off x="6217920" y="1417320"/>
+            <a:ext cx="64008" cy="1600200"/>
           </a:xfrm>
           <a:prstGeom prst="rect">
             <a:avLst/>
@@ -7566,14 +7711,14 @@
       </p:sp>
       <p:sp>
         <p:nvSpPr>
-          <p:cNvPr id="14" name="TextBox 13"/>
+          <p:cNvPr id="11" name="TextBox 10"/>
           <p:cNvSpPr txBox="1"/>
           <p:nvPr/>
         </p:nvSpPr>
         <p:spPr>
           <a:xfrm>
-            <a:off x="3396996" y="2176272"/>
-            <a:ext cx="640080" cy="640080"/>
+            <a:off x="6419088" y="1527048"/>
+            <a:ext cx="5257800" cy="1417320"/>
           </a:xfrm>
           <a:prstGeom prst="rect">
             <a:avLst/>
@@ -7586,142 +7731,52 @@
           </a:bodyPr>
           <a:lstStyle/>
           <a:p>
-            <a:pPr algn="ctr"/>
-            <a:r>
-              <a:rPr sz="2000" b="1" i="0">
-                <a:solidFill>
-                  <a:srgbClr val="FFFFFF"/>
+            <a:r>
+              <a:rPr sz="1200" b="1">
+                <a:solidFill>
+                  <a:srgbClr val="1A3A6B"/>
                 </a:solidFill>
               </a:rPr>
-              <a:t>2</a:t>
-            </a:r>
-          </a:p>
-        </p:txBody>
-      </p:sp>
-      <p:sp>
-        <p:nvSpPr>
-          <p:cNvPr id="15" name="TextBox 14"/>
-          <p:cNvSpPr txBox="1"/>
-          <p:nvPr/>
-        </p:nvSpPr>
-        <p:spPr>
-          <a:xfrm>
-            <a:off x="2802636" y="3017520"/>
-            <a:ext cx="1828800" cy="548640"/>
-          </a:xfrm>
-          <a:prstGeom prst="rect">
-            <a:avLst/>
-          </a:prstGeom>
-          <a:noFill/>
-        </p:spPr>
-        <p:txBody>
-          <a:bodyPr wrap="square">
-            <a:spAutoFit/>
-          </a:bodyPr>
-          <a:lstStyle/>
-          <a:p>
-            <a:pPr algn="ctr"/>
-            <a:r>
-              <a:rPr sz="1400" b="1" i="0">
-                <a:solidFill>
-                  <a:srgbClr val="FFFFFF"/>
+              <a:t>⚡  Zero impacto no fluxo técnico</a:t>
+            </a:r>
+          </a:p>
+          <a:p>
+            <a:pPr algn="l">
+              <a:spcBef>
+                <a:spcPts val="500"/>
+              </a:spcBef>
+            </a:pPr>
+            <a:r>
+              <a:rPr sz="1050" b="0" i="0">
+                <a:solidFill>
+                  <a:srgbClr val="555F6E"/>
                 </a:solidFill>
               </a:rPr>
-              <a:t>Planejar</a:t>
-            </a:r>
-          </a:p>
-        </p:txBody>
-      </p:sp>
-      <p:sp>
-        <p:nvSpPr>
-          <p:cNvPr id="16" name="TextBox 15"/>
-          <p:cNvSpPr txBox="1"/>
-          <p:nvPr/>
-        </p:nvSpPr>
-        <p:spPr>
-          <a:xfrm>
-            <a:off x="2802636" y="3703320"/>
-            <a:ext cx="1828800" cy="1645920"/>
-          </a:xfrm>
-          <a:prstGeom prst="rect">
-            <a:avLst/>
-          </a:prstGeom>
-          <a:noFill/>
-        </p:spPr>
-        <p:txBody>
-          <a:bodyPr wrap="square">
-            <a:spAutoFit/>
-          </a:bodyPr>
-          <a:lstStyle/>
-          <a:p>
-            <a:pPr algn="ctr"/>
-            <a:r>
-              <a:rPr sz="1100" b="0" i="0">
-                <a:solidFill>
-                  <a:srgbClr val="D6E4F7"/>
-                </a:solidFill>
-              </a:rPr>
-              <a:t>Ajuste datas, duração,
-recursos e dependências
-no cronograma</a:t>
-            </a:r>
-          </a:p>
-        </p:txBody>
-      </p:sp>
-      <p:sp>
-        <p:nvSpPr>
-          <p:cNvPr id="17" name="TextBox 16"/>
-          <p:cNvSpPr txBox="1"/>
-          <p:nvPr/>
-        </p:nvSpPr>
-        <p:spPr>
-          <a:xfrm>
-            <a:off x="4814316" y="3611880"/>
-            <a:ext cx="274320" cy="274320"/>
-          </a:xfrm>
-          <a:prstGeom prst="rect">
-            <a:avLst/>
-          </a:prstGeom>
-          <a:noFill/>
-        </p:spPr>
-        <p:txBody>
-          <a:bodyPr wrap="square">
-            <a:spAutoFit/>
-          </a:bodyPr>
-          <a:lstStyle/>
-          <a:p>
-            <a:pPr algn="ctr"/>
-            <a:r>
-              <a:rPr sz="2200" b="1" i="0">
-                <a:solidFill>
-                  <a:srgbClr val="1A3A6B"/>
-                </a:solidFill>
-              </a:rPr>
-              <a:t>→</a:t>
-            </a:r>
-          </a:p>
-        </p:txBody>
-      </p:sp>
-      <p:sp>
-        <p:nvSpPr>
-          <p:cNvPr id="18" name="Rectangle 17"/>
+              <a:t>A equipe continua no Azure DevOps como antes. O NXProject é uma camada de leitura e planejamento — nenhuma mudança de processo necessária.</a:t>
+            </a:r>
+          </a:p>
+        </p:txBody>
+      </p:sp>
+      <p:sp>
+        <p:nvSpPr>
+          <p:cNvPr id="12" name="Rectangle 11"/>
           <p:cNvSpPr/>
           <p:nvPr/>
         </p:nvSpPr>
         <p:spPr>
           <a:xfrm>
-            <a:off x="5088636" y="2011680"/>
-            <a:ext cx="2011680" cy="3474720"/>
+            <a:off x="365760" y="3154680"/>
+            <a:ext cx="5577840" cy="1600200"/>
           </a:xfrm>
           <a:prstGeom prst="rect">
             <a:avLst/>
           </a:prstGeom>
           <a:solidFill>
-            <a:srgbClr val="2B579A"/>
+            <a:srgbClr val="FFFFFF"/>
           </a:solidFill>
           <a:ln>
             <a:solidFill>
-              <a:srgbClr val="2B579A"/>
+              <a:srgbClr val="FFFFFF"/>
             </a:solidFill>
           </a:ln>
         </p:spPr>
@@ -7749,14 +7804,14 @@
       </p:sp>
       <p:sp>
         <p:nvSpPr>
-          <p:cNvPr id="19" name="Rectangle 18"/>
+          <p:cNvPr id="13" name="Rectangle 12"/>
           <p:cNvSpPr/>
           <p:nvPr/>
         </p:nvSpPr>
         <p:spPr>
           <a:xfrm>
-            <a:off x="5774436" y="2176272"/>
-            <a:ext cx="640080" cy="640080"/>
+            <a:off x="365760" y="3154680"/>
+            <a:ext cx="64008" cy="1600200"/>
           </a:xfrm>
           <a:prstGeom prst="rect">
             <a:avLst/>
@@ -7794,14 +7849,14 @@
       </p:sp>
       <p:sp>
         <p:nvSpPr>
-          <p:cNvPr id="20" name="TextBox 19"/>
+          <p:cNvPr id="14" name="TextBox 13"/>
           <p:cNvSpPr txBox="1"/>
           <p:nvPr/>
         </p:nvSpPr>
         <p:spPr>
           <a:xfrm>
-            <a:off x="5774436" y="2176272"/>
-            <a:ext cx="640080" cy="640080"/>
+            <a:off x="566928" y="3264408"/>
+            <a:ext cx="5257800" cy="1417320"/>
           </a:xfrm>
           <a:prstGeom prst="rect">
             <a:avLst/>
@@ -7814,142 +7869,52 @@
           </a:bodyPr>
           <a:lstStyle/>
           <a:p>
-            <a:pPr algn="ctr"/>
-            <a:r>
-              <a:rPr sz="2000" b="1" i="0">
-                <a:solidFill>
-                  <a:srgbClr val="FFFFFF"/>
+            <a:r>
+              <a:rPr sz="1200" b="1">
+                <a:solidFill>
+                  <a:srgbClr val="1A3A6B"/>
                 </a:solidFill>
               </a:rPr>
-              <a:t>3</a:t>
-            </a:r>
-          </a:p>
-        </p:txBody>
-      </p:sp>
-      <p:sp>
-        <p:nvSpPr>
-          <p:cNvPr id="21" name="TextBox 20"/>
-          <p:cNvSpPr txBox="1"/>
-          <p:nvPr/>
-        </p:nvSpPr>
-        <p:spPr>
-          <a:xfrm>
-            <a:off x="5180076" y="3017520"/>
-            <a:ext cx="1828800" cy="548640"/>
-          </a:xfrm>
-          <a:prstGeom prst="rect">
-            <a:avLst/>
-          </a:prstGeom>
-          <a:noFill/>
-        </p:spPr>
-        <p:txBody>
-          <a:bodyPr wrap="square">
-            <a:spAutoFit/>
-          </a:bodyPr>
-          <a:lstStyle/>
-          <a:p>
-            <a:pPr algn="ctr"/>
-            <a:r>
-              <a:rPr sz="1400" b="1" i="0">
-                <a:solidFill>
-                  <a:srgbClr val="FFFFFF"/>
+              <a:t>💰  Redução de retrabalho e custos ocultos</a:t>
+            </a:r>
+          </a:p>
+          <a:p>
+            <a:pPr algn="l">
+              <a:spcBef>
+                <a:spcPts val="500"/>
+              </a:spcBef>
+            </a:pPr>
+            <a:r>
+              <a:rPr sz="1050" b="0" i="0">
+                <a:solidFill>
+                  <a:srgbClr val="555F6E"/>
                 </a:solidFill>
               </a:rPr>
-              <a:t>Visualizar</a:t>
-            </a:r>
-          </a:p>
-        </p:txBody>
-      </p:sp>
-      <p:sp>
-        <p:nvSpPr>
-          <p:cNvPr id="22" name="TextBox 21"/>
-          <p:cNvSpPr txBox="1"/>
-          <p:nvPr/>
-        </p:nvSpPr>
-        <p:spPr>
-          <a:xfrm>
-            <a:off x="5180076" y="3703320"/>
-            <a:ext cx="1828800" cy="1645920"/>
-          </a:xfrm>
-          <a:prstGeom prst="rect">
-            <a:avLst/>
-          </a:prstGeom>
-          <a:noFill/>
-        </p:spPr>
-        <p:txBody>
-          <a:bodyPr wrap="square">
-            <a:spAutoFit/>
-          </a:bodyPr>
-          <a:lstStyle/>
-          <a:p>
-            <a:pPr algn="ctr"/>
-            <a:r>
-              <a:rPr sz="1100" b="0" i="0">
-                <a:solidFill>
-                  <a:srgbClr val="D6E4F7"/>
-                </a:solidFill>
-              </a:rPr>
-              <a:t>Acompanhe no Gantt
-datas, marcos e
-alocação de recursos</a:t>
-            </a:r>
-          </a:p>
-        </p:txBody>
-      </p:sp>
-      <p:sp>
-        <p:nvSpPr>
-          <p:cNvPr id="23" name="TextBox 22"/>
-          <p:cNvSpPr txBox="1"/>
-          <p:nvPr/>
-        </p:nvSpPr>
-        <p:spPr>
-          <a:xfrm>
-            <a:off x="7191756" y="3611880"/>
-            <a:ext cx="274320" cy="274320"/>
-          </a:xfrm>
-          <a:prstGeom prst="rect">
-            <a:avLst/>
-          </a:prstGeom>
-          <a:noFill/>
-        </p:spPr>
-        <p:txBody>
-          <a:bodyPr wrap="square">
-            <a:spAutoFit/>
-          </a:bodyPr>
-          <a:lstStyle/>
-          <a:p>
-            <a:pPr algn="ctr"/>
-            <a:r>
-              <a:rPr sz="2200" b="1" i="0">
-                <a:solidFill>
-                  <a:srgbClr val="1A3A6B"/>
-                </a:solidFill>
-              </a:rPr>
-              <a:t>→</a:t>
-            </a:r>
-          </a:p>
-        </p:txBody>
-      </p:sp>
-      <p:sp>
-        <p:nvSpPr>
-          <p:cNvPr id="24" name="Rectangle 23"/>
+              <a:t>Elimina planilhas paralelas, reuniões de status demoradas e o custo de atrasos não detectados a tempo.</a:t>
+            </a:r>
+          </a:p>
+        </p:txBody>
+      </p:sp>
+      <p:sp>
+        <p:nvSpPr>
+          <p:cNvPr id="15" name="Rectangle 14"/>
           <p:cNvSpPr/>
           <p:nvPr/>
         </p:nvSpPr>
         <p:spPr>
           <a:xfrm>
-            <a:off x="7466076" y="2011680"/>
-            <a:ext cx="2011680" cy="3474720"/>
+            <a:off x="6217920" y="3154680"/>
+            <a:ext cx="5577840" cy="1600200"/>
           </a:xfrm>
           <a:prstGeom prst="rect">
             <a:avLst/>
           </a:prstGeom>
           <a:solidFill>
-            <a:srgbClr val="2B579A"/>
+            <a:srgbClr val="FFFFFF"/>
           </a:solidFill>
           <a:ln>
             <a:solidFill>
-              <a:srgbClr val="2B579A"/>
+              <a:srgbClr val="FFFFFF"/>
             </a:solidFill>
           </a:ln>
         </p:spPr>
@@ -7977,14 +7942,14 @@
       </p:sp>
       <p:sp>
         <p:nvSpPr>
-          <p:cNvPr id="25" name="Rectangle 24"/>
+          <p:cNvPr id="16" name="Rectangle 15"/>
           <p:cNvSpPr/>
           <p:nvPr/>
         </p:nvSpPr>
         <p:spPr>
           <a:xfrm>
-            <a:off x="8151876" y="2176272"/>
-            <a:ext cx="640080" cy="640080"/>
+            <a:off x="6217920" y="3154680"/>
+            <a:ext cx="64008" cy="1600200"/>
           </a:xfrm>
           <a:prstGeom prst="rect">
             <a:avLst/>
@@ -8022,14 +7987,14 @@
       </p:sp>
       <p:sp>
         <p:nvSpPr>
-          <p:cNvPr id="26" name="TextBox 25"/>
+          <p:cNvPr id="17" name="TextBox 16"/>
           <p:cNvSpPr txBox="1"/>
           <p:nvPr/>
         </p:nvSpPr>
         <p:spPr>
           <a:xfrm>
-            <a:off x="8151876" y="2176272"/>
-            <a:ext cx="640080" cy="640080"/>
+            <a:off x="6419088" y="3264408"/>
+            <a:ext cx="5257800" cy="1417320"/>
           </a:xfrm>
           <a:prstGeom prst="rect">
             <a:avLst/>
@@ -8042,142 +8007,52 @@
           </a:bodyPr>
           <a:lstStyle/>
           <a:p>
-            <a:pPr algn="ctr"/>
-            <a:r>
-              <a:rPr sz="2000" b="1" i="0">
-                <a:solidFill>
-                  <a:srgbClr val="FFFFFF"/>
+            <a:r>
+              <a:rPr sz="1200" b="1">
+                <a:solidFill>
+                  <a:srgbClr val="1A3A6B"/>
                 </a:solidFill>
               </a:rPr>
-              <a:t>4</a:t>
-            </a:r>
-          </a:p>
-        </p:txBody>
-      </p:sp>
-      <p:sp>
-        <p:nvSpPr>
-          <p:cNvPr id="27" name="TextBox 26"/>
-          <p:cNvSpPr txBox="1"/>
-          <p:nvPr/>
-        </p:nvSpPr>
-        <p:spPr>
-          <a:xfrm>
-            <a:off x="7557516" y="3017520"/>
-            <a:ext cx="1828800" cy="548640"/>
-          </a:xfrm>
-          <a:prstGeom prst="rect">
-            <a:avLst/>
-          </a:prstGeom>
-          <a:noFill/>
-        </p:spPr>
-        <p:txBody>
-          <a:bodyPr wrap="square">
-            <a:spAutoFit/>
-          </a:bodyPr>
-          <a:lstStyle/>
-          <a:p>
-            <a:pPr algn="ctr"/>
-            <a:r>
-              <a:rPr sz="1400" b="1" i="0">
-                <a:solidFill>
-                  <a:srgbClr val="FFFFFF"/>
+              <a:t>📈  Decisão baseada em dados</a:t>
+            </a:r>
+          </a:p>
+          <a:p>
+            <a:pPr algn="l">
+              <a:spcBef>
+                <a:spcPts val="500"/>
+              </a:spcBef>
+            </a:pPr>
+            <a:r>
+              <a:rPr sz="1050" b="0" i="0">
+                <a:solidFill>
+                  <a:srgbClr val="555F6E"/>
                 </a:solidFill>
               </a:rPr>
-              <a:t>Sincronizar</a:t>
-            </a:r>
-          </a:p>
-        </p:txBody>
-      </p:sp>
-      <p:sp>
-        <p:nvSpPr>
-          <p:cNvPr id="28" name="TextBox 27"/>
-          <p:cNvSpPr txBox="1"/>
-          <p:nvPr/>
-        </p:nvSpPr>
-        <p:spPr>
-          <a:xfrm>
-            <a:off x="7557516" y="3703320"/>
-            <a:ext cx="1828800" cy="1645920"/>
-          </a:xfrm>
-          <a:prstGeom prst="rect">
-            <a:avLst/>
-          </a:prstGeom>
-          <a:noFill/>
-        </p:spPr>
-        <p:txBody>
-          <a:bodyPr wrap="square">
-            <a:spAutoFit/>
-          </a:bodyPr>
-          <a:lstStyle/>
-          <a:p>
-            <a:pPr algn="ctr"/>
-            <a:r>
-              <a:rPr sz="1100" b="0" i="0">
-                <a:solidFill>
-                  <a:srgbClr val="D6E4F7"/>
-                </a:solidFill>
-              </a:rPr>
-              <a:t>Envie de volta ao DevOps
-datas, horas, estados
-e novos work items</a:t>
-            </a:r>
-          </a:p>
-        </p:txBody>
-      </p:sp>
-      <p:sp>
-        <p:nvSpPr>
-          <p:cNvPr id="29" name="TextBox 28"/>
-          <p:cNvSpPr txBox="1"/>
-          <p:nvPr/>
-        </p:nvSpPr>
-        <p:spPr>
-          <a:xfrm>
-            <a:off x="9569196" y="3611880"/>
-            <a:ext cx="274320" cy="274320"/>
-          </a:xfrm>
-          <a:prstGeom prst="rect">
-            <a:avLst/>
-          </a:prstGeom>
-          <a:noFill/>
-        </p:spPr>
-        <p:txBody>
-          <a:bodyPr wrap="square">
-            <a:spAutoFit/>
-          </a:bodyPr>
-          <a:lstStyle/>
-          <a:p>
-            <a:pPr algn="ctr"/>
-            <a:r>
-              <a:rPr sz="2200" b="1" i="0">
-                <a:solidFill>
-                  <a:srgbClr val="1A3A6B"/>
-                </a:solidFill>
-              </a:rPr>
-              <a:t>→</a:t>
-            </a:r>
-          </a:p>
-        </p:txBody>
-      </p:sp>
-      <p:sp>
-        <p:nvSpPr>
-          <p:cNvPr id="30" name="Rectangle 29"/>
+              <a:t>Health Check automático, alocação de recursos e alertas proativos de atraso dão à gestão informação precisa para tomar decisões rápidas.</a:t>
+            </a:r>
+          </a:p>
+        </p:txBody>
+      </p:sp>
+      <p:sp>
+        <p:nvSpPr>
+          <p:cNvPr id="18" name="Rectangle 17"/>
           <p:cNvSpPr/>
           <p:nvPr/>
         </p:nvSpPr>
         <p:spPr>
           <a:xfrm>
-            <a:off x="9843516" y="2011680"/>
-            <a:ext cx="2011680" cy="3474720"/>
+            <a:off x="365760" y="4892040"/>
+            <a:ext cx="5577840" cy="1600200"/>
           </a:xfrm>
           <a:prstGeom prst="rect">
             <a:avLst/>
           </a:prstGeom>
           <a:solidFill>
-            <a:srgbClr val="2B579A"/>
+            <a:srgbClr val="FFFFFF"/>
           </a:solidFill>
           <a:ln>
             <a:solidFill>
-              <a:srgbClr val="2B579A"/>
+              <a:srgbClr val="FFFFFF"/>
             </a:solidFill>
           </a:ln>
         </p:spPr>
@@ -8205,14 +8080,14 @@
       </p:sp>
       <p:sp>
         <p:nvSpPr>
-          <p:cNvPr id="31" name="Rectangle 30"/>
+          <p:cNvPr id="19" name="Rectangle 18"/>
           <p:cNvSpPr/>
           <p:nvPr/>
         </p:nvSpPr>
         <p:spPr>
           <a:xfrm>
-            <a:off x="10529316" y="2176272"/>
-            <a:ext cx="640080" cy="640080"/>
+            <a:off x="365760" y="4892040"/>
+            <a:ext cx="64008" cy="1600200"/>
           </a:xfrm>
           <a:prstGeom prst="rect">
             <a:avLst/>
@@ -8250,14 +8125,14 @@
       </p:sp>
       <p:sp>
         <p:nvSpPr>
-          <p:cNvPr id="32" name="TextBox 31"/>
+          <p:cNvPr id="20" name="TextBox 19"/>
           <p:cNvSpPr txBox="1"/>
           <p:nvPr/>
         </p:nvSpPr>
         <p:spPr>
           <a:xfrm>
-            <a:off x="10529316" y="2176272"/>
-            <a:ext cx="640080" cy="640080"/>
+            <a:off x="566928" y="5001768"/>
+            <a:ext cx="5257800" cy="1417320"/>
           </a:xfrm>
           <a:prstGeom prst="rect">
             <a:avLst/>
@@ -8270,28 +8145,132 @@
           </a:bodyPr>
           <a:lstStyle/>
           <a:p>
-            <a:pPr algn="ctr"/>
-            <a:r>
-              <a:rPr sz="2000" b="1" i="0">
-                <a:solidFill>
-                  <a:srgbClr val="FFFFFF"/>
+            <a:r>
+              <a:rPr sz="1200" b="1">
+                <a:solidFill>
+                  <a:srgbClr val="1A3A6B"/>
                 </a:solidFill>
               </a:rPr>
-              <a:t>5</a:t>
-            </a:r>
-          </a:p>
-        </p:txBody>
-      </p:sp>
-      <p:sp>
-        <p:nvSpPr>
-          <p:cNvPr id="33" name="TextBox 32"/>
+              <a:t>🔒  Segurança e controle</a:t>
+            </a:r>
+          </a:p>
+          <a:p>
+            <a:pPr algn="l">
+              <a:spcBef>
+                <a:spcPts val="500"/>
+              </a:spcBef>
+            </a:pPr>
+            <a:r>
+              <a:rPr sz="1050" b="0" i="0">
+                <a:solidFill>
+                  <a:srgbClr val="555F6E"/>
+                </a:solidFill>
+              </a:rPr>
+              <a:t>Credenciais Azure DevOps protegidas por DPAPI (criptografia Windows por usuário). Dados do projeto em arquivo local — sem cloud obrigatório. A IA Local roda o modelo na própria máquina, sem enviar dados do projeto para fora.</a:t>
+            </a:r>
+          </a:p>
+        </p:txBody>
+      </p:sp>
+      <p:sp>
+        <p:nvSpPr>
+          <p:cNvPr id="21" name="Rectangle 20"/>
+          <p:cNvSpPr/>
+          <p:nvPr/>
+        </p:nvSpPr>
+        <p:spPr>
+          <a:xfrm>
+            <a:off x="6217920" y="4892040"/>
+            <a:ext cx="5577840" cy="1600200"/>
+          </a:xfrm>
+          <a:prstGeom prst="rect">
+            <a:avLst/>
+          </a:prstGeom>
+          <a:solidFill>
+            <a:srgbClr val="FFFFFF"/>
+          </a:solidFill>
+          <a:ln>
+            <a:solidFill>
+              <a:srgbClr val="FFFFFF"/>
+            </a:solidFill>
+          </a:ln>
+        </p:spPr>
+        <p:style>
+          <a:lnRef idx="1">
+            <a:schemeClr val="accent1"/>
+          </a:lnRef>
+          <a:fillRef idx="3">
+            <a:schemeClr val="accent1"/>
+          </a:fillRef>
+          <a:effectRef idx="2">
+            <a:schemeClr val="accent1"/>
+          </a:effectRef>
+          <a:fontRef idx="minor">
+            <a:schemeClr val="lt1"/>
+          </a:fontRef>
+        </p:style>
+        <p:txBody>
+          <a:bodyPr rtlCol="0" anchor="ctr"/>
+          <a:lstStyle/>
+          <a:p>
+            <a:pPr algn="ctr"/>
+          </a:p>
+        </p:txBody>
+      </p:sp>
+      <p:sp>
+        <p:nvSpPr>
+          <p:cNvPr id="22" name="Rectangle 21"/>
+          <p:cNvSpPr/>
+          <p:nvPr/>
+        </p:nvSpPr>
+        <p:spPr>
+          <a:xfrm>
+            <a:off x="6217920" y="4892040"/>
+            <a:ext cx="64008" cy="1600200"/>
+          </a:xfrm>
+          <a:prstGeom prst="rect">
+            <a:avLst/>
+          </a:prstGeom>
+          <a:solidFill>
+            <a:srgbClr val="E87B00"/>
+          </a:solidFill>
+          <a:ln>
+            <a:solidFill>
+              <a:srgbClr val="E87B00"/>
+            </a:solidFill>
+          </a:ln>
+        </p:spPr>
+        <p:style>
+          <a:lnRef idx="1">
+            <a:schemeClr val="accent1"/>
+          </a:lnRef>
+          <a:fillRef idx="3">
+            <a:schemeClr val="accent1"/>
+          </a:fillRef>
+          <a:effectRef idx="2">
+            <a:schemeClr val="accent1"/>
+          </a:effectRef>
+          <a:fontRef idx="minor">
+            <a:schemeClr val="lt1"/>
+          </a:fontRef>
+        </p:style>
+        <p:txBody>
+          <a:bodyPr rtlCol="0" anchor="ctr"/>
+          <a:lstStyle/>
+          <a:p>
+            <a:pPr algn="ctr"/>
+          </a:p>
+        </p:txBody>
+      </p:sp>
+      <p:sp>
+        <p:nvSpPr>
+          <p:cNvPr id="23" name="TextBox 22"/>
           <p:cNvSpPr txBox="1"/>
           <p:nvPr/>
         </p:nvSpPr>
         <p:spPr>
           <a:xfrm>
-            <a:off x="9934956" y="3017520"/>
-            <a:ext cx="1828800" cy="548640"/>
+            <a:off x="6419088" y="5001768"/>
+            <a:ext cx="5257800" cy="1417320"/>
           </a:xfrm>
           <a:prstGeom prst="rect">
             <a:avLst/>
@@ -8304,50 +8283,28 @@
           </a:bodyPr>
           <a:lstStyle/>
           <a:p>
-            <a:pPr algn="ctr"/>
-            <a:r>
-              <a:rPr sz="1400" b="1" i="0">
-                <a:solidFill>
-                  <a:srgbClr val="FFFFFF"/>
+            <a:r>
+              <a:rPr sz="1200" b="1">
+                <a:solidFill>
+                  <a:srgbClr val="1A3A6B"/>
                 </a:solidFill>
               </a:rPr>
-              <a:t>Monitorar</a:t>
-            </a:r>
-          </a:p>
-        </p:txBody>
-      </p:sp>
-      <p:sp>
-        <p:nvSpPr>
-          <p:cNvPr id="34" name="TextBox 33"/>
-          <p:cNvSpPr txBox="1"/>
-          <p:nvPr/>
-        </p:nvSpPr>
-        <p:spPr>
-          <a:xfrm>
-            <a:off x="9934956" y="3703320"/>
-            <a:ext cx="1828800" cy="1645920"/>
-          </a:xfrm>
-          <a:prstGeom prst="rect">
-            <a:avLst/>
-          </a:prstGeom>
-          <a:noFill/>
-        </p:spPr>
-        <p:txBody>
-          <a:bodyPr wrap="square">
-            <a:spAutoFit/>
-          </a:bodyPr>
-          <a:lstStyle/>
-          <a:p>
-            <a:pPr algn="ctr"/>
-            <a:r>
-              <a:rPr sz="1100" b="0" i="0">
-                <a:solidFill>
-                  <a:srgbClr val="D6E4F7"/>
+              <a:t>📦  Implantação simples</a:t>
+            </a:r>
+          </a:p>
+          <a:p>
+            <a:pPr algn="l">
+              <a:spcBef>
+                <a:spcPts val="500"/>
+              </a:spcBef>
+            </a:pPr>
+            <a:r>
+              <a:rPr sz="1050" b="0" i="0">
+                <a:solidFill>
+                  <a:srgbClr val="555F6E"/>
                 </a:solidFill>
               </a:rPr>
-              <a:t>Health Check automático
-alerta atrasos,
-bloqueios e sobrecarga</a:t>
+              <a:t>Aplicativo desktop com instalador próprio: sem servidor, sem banco de dados e sem infraestrutura adicional. Pronto para uso em minutos.</a:t>
             </a:r>
           </a:p>
         </p:txBody>
@@ -8534,7 +8491,7 @@
                   <a:srgbClr val="FFFFFF"/>
                 </a:solidFill>
               </a:rPr>
-              <a:t>Para quem é o NXProject</a:t>
+              <a:t>Como funciona — fluxo de trabalho</a:t>
             </a:r>
           </a:p>
         </p:txBody>
@@ -8547,18 +8504,18 @@
         </p:nvSpPr>
         <p:spPr>
           <a:xfrm>
-            <a:off x="457200" y="1554480"/>
-            <a:ext cx="2651760" cy="4663440"/>
+            <a:off x="196596" y="2011680"/>
+            <a:ext cx="1737360" cy="3474720"/>
           </a:xfrm>
           <a:prstGeom prst="rect">
             <a:avLst/>
           </a:prstGeom>
           <a:solidFill>
-            <a:srgbClr val="FFFFFF"/>
+            <a:srgbClr val="2B579A"/>
           </a:solidFill>
           <a:ln>
             <a:solidFill>
-              <a:srgbClr val="FFFFFF"/>
+              <a:srgbClr val="2B579A"/>
             </a:solidFill>
           </a:ln>
         </p:spPr>
@@ -8592,8 +8549,8 @@
         </p:nvSpPr>
         <p:spPr>
           <a:xfrm>
-            <a:off x="457200" y="1554480"/>
-            <a:ext cx="2651760" cy="54864"/>
+            <a:off x="745236" y="2176272"/>
+            <a:ext cx="640080" cy="640080"/>
           </a:xfrm>
           <a:prstGeom prst="rect">
             <a:avLst/>
@@ -8637,8 +8594,8 @@
         </p:nvSpPr>
         <p:spPr>
           <a:xfrm>
-            <a:off x="457200" y="1737360"/>
-            <a:ext cx="2651760" cy="640080"/>
+            <a:off x="745236" y="2176272"/>
+            <a:ext cx="640080" cy="640080"/>
           </a:xfrm>
           <a:prstGeom prst="rect">
             <a:avLst/>
@@ -8653,12 +8610,12 @@
           <a:p>
             <a:pPr algn="ctr"/>
             <a:r>
-              <a:rPr sz="3400" b="0" i="0">
-                <a:solidFill>
-                  <a:srgbClr val="2D2D2D"/>
+              <a:rPr sz="2000" b="1" i="0">
+                <a:solidFill>
+                  <a:srgbClr val="FFFFFF"/>
                 </a:solidFill>
               </a:rPr>
-              <a:t>🧑‍💼</a:t>
+              <a:t>1</a:t>
             </a:r>
           </a:p>
         </p:txBody>
@@ -8671,8 +8628,8 @@
         </p:nvSpPr>
         <p:spPr>
           <a:xfrm>
-            <a:off x="548640" y="2468880"/>
-            <a:ext cx="2468880" cy="731520"/>
+            <a:off x="288036" y="3017520"/>
+            <a:ext cx="1554480" cy="548640"/>
           </a:xfrm>
           <a:prstGeom prst="rect">
             <a:avLst/>
@@ -8689,11 +8646,10 @@
             <a:r>
               <a:rPr sz="1400" b="1" i="0">
                 <a:solidFill>
-                  <a:srgbClr val="1A3A6B"/>
+                  <a:srgbClr val="FFFFFF"/>
                 </a:solidFill>
               </a:rPr>
-              <a:t>Gerente
-de Projeto</a:t>
+              <a:t>Importar</a:t>
             </a:r>
           </a:p>
         </p:txBody>
@@ -8706,8 +8662,8 @@
         </p:nvSpPr>
         <p:spPr>
           <a:xfrm>
-            <a:off x="594360" y="3291840"/>
-            <a:ext cx="2377440" cy="2743200"/>
+            <a:off x="288036" y="3703320"/>
+            <a:ext cx="1554480" cy="1645920"/>
           </a:xfrm>
           <a:prstGeom prst="rect">
             <a:avLst/>
@@ -8724,34 +8680,70 @@
             <a:r>
               <a:rPr sz="1100" b="0" i="0">
                 <a:solidFill>
-                  <a:srgbClr val="555F6E"/>
+                  <a:srgbClr val="D6E4F7"/>
                 </a:solidFill>
               </a:rPr>
-              <a:t>Cronograma integrado ao backlog, alertas de atraso, visão de dependências e datas negociadas.</a:t>
-            </a:r>
-          </a:p>
-        </p:txBody>
-      </p:sp>
-      <p:sp>
-        <p:nvSpPr>
-          <p:cNvPr id="11" name="Rectangle 10"/>
+              <a:t>Conecte ao Azure DevOps
+e importe a hierarquia
+de work items</a:t>
+            </a:r>
+          </a:p>
+        </p:txBody>
+      </p:sp>
+      <p:sp>
+        <p:nvSpPr>
+          <p:cNvPr id="11" name="TextBox 10"/>
+          <p:cNvSpPr txBox="1"/>
+          <p:nvPr/>
+        </p:nvSpPr>
+        <p:spPr>
+          <a:xfrm>
+            <a:off x="2025396" y="3611880"/>
+            <a:ext cx="182880" cy="274320"/>
+          </a:xfrm>
+          <a:prstGeom prst="rect">
+            <a:avLst/>
+          </a:prstGeom>
+          <a:noFill/>
+        </p:spPr>
+        <p:txBody>
+          <a:bodyPr wrap="square">
+            <a:spAutoFit/>
+          </a:bodyPr>
+          <a:lstStyle/>
+          <a:p>
+            <a:pPr algn="ctr"/>
+            <a:r>
+              <a:rPr sz="2200" b="1" i="0">
+                <a:solidFill>
+                  <a:srgbClr val="1A3A6B"/>
+                </a:solidFill>
+              </a:rPr>
+              <a:t>→</a:t>
+            </a:r>
+          </a:p>
+        </p:txBody>
+      </p:sp>
+      <p:sp>
+        <p:nvSpPr>
+          <p:cNvPr id="12" name="Rectangle 11"/>
           <p:cNvSpPr/>
           <p:nvPr/>
         </p:nvSpPr>
         <p:spPr>
           <a:xfrm>
-            <a:off x="3383280" y="1554480"/>
-            <a:ext cx="2651760" cy="4663440"/>
+            <a:off x="2208276" y="2011680"/>
+            <a:ext cx="1737360" cy="3474720"/>
           </a:xfrm>
           <a:prstGeom prst="rect">
             <a:avLst/>
           </a:prstGeom>
           <a:solidFill>
-            <a:srgbClr val="FFFFFF"/>
+            <a:srgbClr val="2B579A"/>
           </a:solidFill>
           <a:ln>
             <a:solidFill>
-              <a:srgbClr val="FFFFFF"/>
+              <a:srgbClr val="2B579A"/>
             </a:solidFill>
           </a:ln>
         </p:spPr>
@@ -8779,14 +8771,14 @@
       </p:sp>
       <p:sp>
         <p:nvSpPr>
-          <p:cNvPr id="12" name="Rectangle 11"/>
+          <p:cNvPr id="13" name="Rectangle 12"/>
           <p:cNvSpPr/>
           <p:nvPr/>
         </p:nvSpPr>
         <p:spPr>
           <a:xfrm>
-            <a:off x="3383280" y="1554480"/>
-            <a:ext cx="2651760" cy="54864"/>
+            <a:off x="2756916" y="2176272"/>
+            <a:ext cx="640080" cy="640080"/>
           </a:xfrm>
           <a:prstGeom prst="rect">
             <a:avLst/>
@@ -8824,14 +8816,14 @@
       </p:sp>
       <p:sp>
         <p:nvSpPr>
-          <p:cNvPr id="13" name="TextBox 12"/>
+          <p:cNvPr id="14" name="TextBox 13"/>
           <p:cNvSpPr txBox="1"/>
           <p:nvPr/>
         </p:nvSpPr>
         <p:spPr>
           <a:xfrm>
-            <a:off x="3383280" y="1737360"/>
-            <a:ext cx="2651760" cy="640080"/>
+            <a:off x="2756916" y="2176272"/>
+            <a:ext cx="640080" cy="640080"/>
           </a:xfrm>
           <a:prstGeom prst="rect">
             <a:avLst/>
@@ -8846,26 +8838,26 @@
           <a:p>
             <a:pPr algn="ctr"/>
             <a:r>
-              <a:rPr sz="3400" b="0" i="0">
-                <a:solidFill>
-                  <a:srgbClr val="2D2D2D"/>
+              <a:rPr sz="2000" b="1" i="0">
+                <a:solidFill>
+                  <a:srgbClr val="FFFFFF"/>
                 </a:solidFill>
               </a:rPr>
-              <a:t>🔄</a:t>
-            </a:r>
-          </a:p>
-        </p:txBody>
-      </p:sp>
-      <p:sp>
-        <p:nvSpPr>
-          <p:cNvPr id="14" name="TextBox 13"/>
+              <a:t>2</a:t>
+            </a:r>
+          </a:p>
+        </p:txBody>
+      </p:sp>
+      <p:sp>
+        <p:nvSpPr>
+          <p:cNvPr id="15" name="TextBox 14"/>
           <p:cNvSpPr txBox="1"/>
           <p:nvPr/>
         </p:nvSpPr>
         <p:spPr>
           <a:xfrm>
-            <a:off x="3474720" y="2468880"/>
-            <a:ext cx="2468880" cy="731520"/>
+            <a:off x="2299716" y="3017520"/>
+            <a:ext cx="1554480" cy="548640"/>
           </a:xfrm>
           <a:prstGeom prst="rect">
             <a:avLst/>
@@ -8882,25 +8874,24 @@
             <a:r>
               <a:rPr sz="1400" b="1" i="0">
                 <a:solidFill>
-                  <a:srgbClr val="1A3A6B"/>
+                  <a:srgbClr val="FFFFFF"/>
                 </a:solidFill>
               </a:rPr>
-              <a:t>Scrum Master
-/ RTE</a:t>
-            </a:r>
-          </a:p>
-        </p:txBody>
-      </p:sp>
-      <p:sp>
-        <p:nvSpPr>
-          <p:cNvPr id="15" name="TextBox 14"/>
+              <a:t>Planejar</a:t>
+            </a:r>
+          </a:p>
+        </p:txBody>
+      </p:sp>
+      <p:sp>
+        <p:nvSpPr>
+          <p:cNvPr id="16" name="TextBox 15"/>
           <p:cNvSpPr txBox="1"/>
           <p:nvPr/>
         </p:nvSpPr>
         <p:spPr>
           <a:xfrm>
-            <a:off x="3520440" y="3291840"/>
-            <a:ext cx="2377440" cy="2743200"/>
+            <a:off x="2299716" y="3703320"/>
+            <a:ext cx="1554480" cy="1645920"/>
           </a:xfrm>
           <a:prstGeom prst="rect">
             <a:avLst/>
@@ -8917,34 +8908,70 @@
             <a:r>
               <a:rPr sz="1100" b="0" i="0">
                 <a:solidFill>
-                  <a:srgbClr val="555F6E"/>
+                  <a:srgbClr val="D6E4F7"/>
                 </a:solidFill>
               </a:rPr>
-              <a:t>Capacidade por sprint, conflito de alocação, impacto de mudanças e cascata automática.</a:t>
-            </a:r>
-          </a:p>
-        </p:txBody>
-      </p:sp>
-      <p:sp>
-        <p:nvSpPr>
-          <p:cNvPr id="16" name="Rectangle 15"/>
+              <a:t>Ajuste datas, duração,
+recursos e dependências
+no cronograma</a:t>
+            </a:r>
+          </a:p>
+        </p:txBody>
+      </p:sp>
+      <p:sp>
+        <p:nvSpPr>
+          <p:cNvPr id="17" name="TextBox 16"/>
+          <p:cNvSpPr txBox="1"/>
+          <p:nvPr/>
+        </p:nvSpPr>
+        <p:spPr>
+          <a:xfrm>
+            <a:off x="4037076" y="3611880"/>
+            <a:ext cx="182880" cy="274320"/>
+          </a:xfrm>
+          <a:prstGeom prst="rect">
+            <a:avLst/>
+          </a:prstGeom>
+          <a:noFill/>
+        </p:spPr>
+        <p:txBody>
+          <a:bodyPr wrap="square">
+            <a:spAutoFit/>
+          </a:bodyPr>
+          <a:lstStyle/>
+          <a:p>
+            <a:pPr algn="ctr"/>
+            <a:r>
+              <a:rPr sz="2200" b="1" i="0">
+                <a:solidFill>
+                  <a:srgbClr val="1A3A6B"/>
+                </a:solidFill>
+              </a:rPr>
+              <a:t>→</a:t>
+            </a:r>
+          </a:p>
+        </p:txBody>
+      </p:sp>
+      <p:sp>
+        <p:nvSpPr>
+          <p:cNvPr id="18" name="Rectangle 17"/>
           <p:cNvSpPr/>
           <p:nvPr/>
         </p:nvSpPr>
         <p:spPr>
           <a:xfrm>
-            <a:off x="6309360" y="1554480"/>
-            <a:ext cx="2651760" cy="4663440"/>
+            <a:off x="4219956" y="2011680"/>
+            <a:ext cx="1737360" cy="3474720"/>
           </a:xfrm>
           <a:prstGeom prst="rect">
             <a:avLst/>
           </a:prstGeom>
           <a:solidFill>
-            <a:srgbClr val="FFFFFF"/>
+            <a:srgbClr val="2B579A"/>
           </a:solidFill>
           <a:ln>
             <a:solidFill>
-              <a:srgbClr val="FFFFFF"/>
+              <a:srgbClr val="2B579A"/>
             </a:solidFill>
           </a:ln>
         </p:spPr>
@@ -8972,14 +8999,14 @@
       </p:sp>
       <p:sp>
         <p:nvSpPr>
-          <p:cNvPr id="17" name="Rectangle 16"/>
+          <p:cNvPr id="19" name="Rectangle 18"/>
           <p:cNvSpPr/>
           <p:nvPr/>
         </p:nvSpPr>
         <p:spPr>
           <a:xfrm>
-            <a:off x="6309360" y="1554480"/>
-            <a:ext cx="2651760" cy="54864"/>
+            <a:off x="4768596" y="2176272"/>
+            <a:ext cx="640080" cy="640080"/>
           </a:xfrm>
           <a:prstGeom prst="rect">
             <a:avLst/>
@@ -9017,14 +9044,14 @@
       </p:sp>
       <p:sp>
         <p:nvSpPr>
-          <p:cNvPr id="18" name="TextBox 17"/>
+          <p:cNvPr id="20" name="TextBox 19"/>
           <p:cNvSpPr txBox="1"/>
           <p:nvPr/>
         </p:nvSpPr>
         <p:spPr>
           <a:xfrm>
-            <a:off x="6309360" y="1737360"/>
-            <a:ext cx="2651760" cy="640080"/>
+            <a:off x="4768596" y="2176272"/>
+            <a:ext cx="640080" cy="640080"/>
           </a:xfrm>
           <a:prstGeom prst="rect">
             <a:avLst/>
@@ -9039,26 +9066,26 @@
           <a:p>
             <a:pPr algn="ctr"/>
             <a:r>
-              <a:rPr sz="3400" b="0" i="0">
-                <a:solidFill>
-                  <a:srgbClr val="2D2D2D"/>
+              <a:rPr sz="2000" b="1" i="0">
+                <a:solidFill>
+                  <a:srgbClr val="FFFFFF"/>
                 </a:solidFill>
               </a:rPr>
-              <a:t>💻</a:t>
-            </a:r>
-          </a:p>
-        </p:txBody>
-      </p:sp>
-      <p:sp>
-        <p:nvSpPr>
-          <p:cNvPr id="19" name="TextBox 18"/>
+              <a:t>3</a:t>
+            </a:r>
+          </a:p>
+        </p:txBody>
+      </p:sp>
+      <p:sp>
+        <p:nvSpPr>
+          <p:cNvPr id="21" name="TextBox 20"/>
           <p:cNvSpPr txBox="1"/>
           <p:nvPr/>
         </p:nvSpPr>
         <p:spPr>
           <a:xfrm>
-            <a:off x="6400800" y="2468880"/>
-            <a:ext cx="2468880" cy="731520"/>
+            <a:off x="4311396" y="3017520"/>
+            <a:ext cx="1554480" cy="548640"/>
           </a:xfrm>
           <a:prstGeom prst="rect">
             <a:avLst/>
@@ -9075,24 +9102,24 @@
             <a:r>
               <a:rPr sz="1400" b="1" i="0">
                 <a:solidFill>
-                  <a:srgbClr val="1A3A6B"/>
+                  <a:srgbClr val="FFFFFF"/>
                 </a:solidFill>
               </a:rPr>
-              <a:t>Tech Lead</a:t>
-            </a:r>
-          </a:p>
-        </p:txBody>
-      </p:sp>
-      <p:sp>
-        <p:nvSpPr>
-          <p:cNvPr id="20" name="TextBox 19"/>
+              <a:t>Visualizar</a:t>
+            </a:r>
+          </a:p>
+        </p:txBody>
+      </p:sp>
+      <p:sp>
+        <p:nvSpPr>
+          <p:cNvPr id="22" name="TextBox 21"/>
           <p:cNvSpPr txBox="1"/>
           <p:nvPr/>
         </p:nvSpPr>
         <p:spPr>
           <a:xfrm>
-            <a:off x="6446520" y="3291840"/>
-            <a:ext cx="2377440" cy="2743200"/>
+            <a:off x="4311396" y="3703320"/>
+            <a:ext cx="1554480" cy="1645920"/>
           </a:xfrm>
           <a:prstGeom prst="rect">
             <a:avLst/>
@@ -9109,34 +9136,70 @@
             <a:r>
               <a:rPr sz="1100" b="0" i="0">
                 <a:solidFill>
-                  <a:srgbClr val="555F6E"/>
+                  <a:srgbClr val="D6E4F7"/>
                 </a:solidFill>
               </a:rPr>
-              <a:t>Visão de Features e Stories com predecessoras, estimativas em horas e rastreabilidade.</a:t>
-            </a:r>
-          </a:p>
-        </p:txBody>
-      </p:sp>
-      <p:sp>
-        <p:nvSpPr>
-          <p:cNvPr id="21" name="Rectangle 20"/>
+              <a:t>Acompanhe no Gantt
+datas, marcos e
+alocação de recursos</a:t>
+            </a:r>
+          </a:p>
+        </p:txBody>
+      </p:sp>
+      <p:sp>
+        <p:nvSpPr>
+          <p:cNvPr id="23" name="TextBox 22"/>
+          <p:cNvSpPr txBox="1"/>
+          <p:nvPr/>
+        </p:nvSpPr>
+        <p:spPr>
+          <a:xfrm>
+            <a:off x="6048756" y="3611880"/>
+            <a:ext cx="182880" cy="274320"/>
+          </a:xfrm>
+          <a:prstGeom prst="rect">
+            <a:avLst/>
+          </a:prstGeom>
+          <a:noFill/>
+        </p:spPr>
+        <p:txBody>
+          <a:bodyPr wrap="square">
+            <a:spAutoFit/>
+          </a:bodyPr>
+          <a:lstStyle/>
+          <a:p>
+            <a:pPr algn="ctr"/>
+            <a:r>
+              <a:rPr sz="2200" b="1" i="0">
+                <a:solidFill>
+                  <a:srgbClr val="1A3A6B"/>
+                </a:solidFill>
+              </a:rPr>
+              <a:t>→</a:t>
+            </a:r>
+          </a:p>
+        </p:txBody>
+      </p:sp>
+      <p:sp>
+        <p:nvSpPr>
+          <p:cNvPr id="24" name="Rectangle 23"/>
           <p:cNvSpPr/>
           <p:nvPr/>
         </p:nvSpPr>
         <p:spPr>
           <a:xfrm>
-            <a:off x="9235440" y="1554480"/>
-            <a:ext cx="2651760" cy="4663440"/>
+            <a:off x="6231636" y="2011680"/>
+            <a:ext cx="1737360" cy="3474720"/>
           </a:xfrm>
           <a:prstGeom prst="rect">
             <a:avLst/>
           </a:prstGeom>
           <a:solidFill>
-            <a:srgbClr val="FFFFFF"/>
+            <a:srgbClr val="2B579A"/>
           </a:solidFill>
           <a:ln>
             <a:solidFill>
-              <a:srgbClr val="FFFFFF"/>
+              <a:srgbClr val="2B579A"/>
             </a:solidFill>
           </a:ln>
         </p:spPr>
@@ -9164,14 +9227,14 @@
       </p:sp>
       <p:sp>
         <p:nvSpPr>
-          <p:cNvPr id="22" name="Rectangle 21"/>
+          <p:cNvPr id="25" name="Rectangle 24"/>
           <p:cNvSpPr/>
           <p:nvPr/>
         </p:nvSpPr>
         <p:spPr>
           <a:xfrm>
-            <a:off x="9235440" y="1554480"/>
-            <a:ext cx="2651760" cy="54864"/>
+            <a:off x="6780276" y="2176272"/>
+            <a:ext cx="640080" cy="640080"/>
           </a:xfrm>
           <a:prstGeom prst="rect">
             <a:avLst/>
@@ -9209,14 +9272,14 @@
       </p:sp>
       <p:sp>
         <p:nvSpPr>
-          <p:cNvPr id="23" name="TextBox 22"/>
+          <p:cNvPr id="26" name="TextBox 25"/>
           <p:cNvSpPr txBox="1"/>
           <p:nvPr/>
         </p:nvSpPr>
         <p:spPr>
           <a:xfrm>
-            <a:off x="9235440" y="1737360"/>
-            <a:ext cx="2651760" cy="640080"/>
+            <a:off x="6780276" y="2176272"/>
+            <a:ext cx="640080" cy="640080"/>
           </a:xfrm>
           <a:prstGeom prst="rect">
             <a:avLst/>
@@ -9231,26 +9294,26 @@
           <a:p>
             <a:pPr algn="ctr"/>
             <a:r>
-              <a:rPr sz="3400" b="0" i="0">
-                <a:solidFill>
-                  <a:srgbClr val="2D2D2D"/>
+              <a:rPr sz="2000" b="1" i="0">
+                <a:solidFill>
+                  <a:srgbClr val="FFFFFF"/>
                 </a:solidFill>
               </a:rPr>
-              <a:t>📊</a:t>
-            </a:r>
-          </a:p>
-        </p:txBody>
-      </p:sp>
-      <p:sp>
-        <p:nvSpPr>
-          <p:cNvPr id="24" name="TextBox 23"/>
+              <a:t>4</a:t>
+            </a:r>
+          </a:p>
+        </p:txBody>
+      </p:sp>
+      <p:sp>
+        <p:nvSpPr>
+          <p:cNvPr id="27" name="TextBox 26"/>
           <p:cNvSpPr txBox="1"/>
           <p:nvPr/>
         </p:nvSpPr>
         <p:spPr>
           <a:xfrm>
-            <a:off x="9326880" y="2468880"/>
-            <a:ext cx="2468880" cy="731520"/>
+            <a:off x="6323076" y="3017520"/>
+            <a:ext cx="1554480" cy="548640"/>
           </a:xfrm>
           <a:prstGeom prst="rect">
             <a:avLst/>
@@ -9267,25 +9330,24 @@
             <a:r>
               <a:rPr sz="1400" b="1" i="0">
                 <a:solidFill>
-                  <a:srgbClr val="1A3A6B"/>
+                  <a:srgbClr val="FFFFFF"/>
                 </a:solidFill>
               </a:rPr>
-              <a:t>Gestão
-/ PMO</a:t>
-            </a:r>
-          </a:p>
-        </p:txBody>
-      </p:sp>
-      <p:sp>
-        <p:nvSpPr>
-          <p:cNvPr id="25" name="TextBox 24"/>
+              <a:t>Executar</a:t>
+            </a:r>
+          </a:p>
+        </p:txBody>
+      </p:sp>
+      <p:sp>
+        <p:nvSpPr>
+          <p:cNvPr id="28" name="TextBox 27"/>
           <p:cNvSpPr txBox="1"/>
           <p:nvPr/>
         </p:nvSpPr>
         <p:spPr>
           <a:xfrm>
-            <a:off x="9372600" y="3291840"/>
-            <a:ext cx="2377440" cy="2743200"/>
+            <a:off x="6323076" y="3703320"/>
+            <a:ext cx="1554480" cy="1645920"/>
           </a:xfrm>
           <a:prstGeom prst="rect">
             <a:avLst/>
@@ -9302,10 +9364,468 @@
             <a:r>
               <a:rPr sz="1100" b="0" i="0">
                 <a:solidFill>
-                  <a:srgbClr val="555F6E"/>
+                  <a:srgbClr val="D6E4F7"/>
                 </a:solidFill>
               </a:rPr>
-              <a:t>Visão consolidada do portfólio, exportação para MS Project/Excel e Health Check executivo.</a:t>
+              <a:t>O time detalha as Tasks
+e conduz o dia a dia
+no TaskBoard</a:t>
+            </a:r>
+          </a:p>
+        </p:txBody>
+      </p:sp>
+      <p:sp>
+        <p:nvSpPr>
+          <p:cNvPr id="29" name="TextBox 28"/>
+          <p:cNvSpPr txBox="1"/>
+          <p:nvPr/>
+        </p:nvSpPr>
+        <p:spPr>
+          <a:xfrm>
+            <a:off x="8060436" y="3611880"/>
+            <a:ext cx="182880" cy="274320"/>
+          </a:xfrm>
+          <a:prstGeom prst="rect">
+            <a:avLst/>
+          </a:prstGeom>
+          <a:noFill/>
+        </p:spPr>
+        <p:txBody>
+          <a:bodyPr wrap="square">
+            <a:spAutoFit/>
+          </a:bodyPr>
+          <a:lstStyle/>
+          <a:p>
+            <a:pPr algn="ctr"/>
+            <a:r>
+              <a:rPr sz="2200" b="1" i="0">
+                <a:solidFill>
+                  <a:srgbClr val="1A3A6B"/>
+                </a:solidFill>
+              </a:rPr>
+              <a:t>→</a:t>
+            </a:r>
+          </a:p>
+        </p:txBody>
+      </p:sp>
+      <p:sp>
+        <p:nvSpPr>
+          <p:cNvPr id="30" name="Rectangle 29"/>
+          <p:cNvSpPr/>
+          <p:nvPr/>
+        </p:nvSpPr>
+        <p:spPr>
+          <a:xfrm>
+            <a:off x="8243316" y="2011680"/>
+            <a:ext cx="1737360" cy="3474720"/>
+          </a:xfrm>
+          <a:prstGeom prst="rect">
+            <a:avLst/>
+          </a:prstGeom>
+          <a:solidFill>
+            <a:srgbClr val="2B579A"/>
+          </a:solidFill>
+          <a:ln>
+            <a:solidFill>
+              <a:srgbClr val="2B579A"/>
+            </a:solidFill>
+          </a:ln>
+        </p:spPr>
+        <p:style>
+          <a:lnRef idx="1">
+            <a:schemeClr val="accent1"/>
+          </a:lnRef>
+          <a:fillRef idx="3">
+            <a:schemeClr val="accent1"/>
+          </a:fillRef>
+          <a:effectRef idx="2">
+            <a:schemeClr val="accent1"/>
+          </a:effectRef>
+          <a:fontRef idx="minor">
+            <a:schemeClr val="lt1"/>
+          </a:fontRef>
+        </p:style>
+        <p:txBody>
+          <a:bodyPr rtlCol="0" anchor="ctr"/>
+          <a:lstStyle/>
+          <a:p>
+            <a:pPr algn="ctr"/>
+          </a:p>
+        </p:txBody>
+      </p:sp>
+      <p:sp>
+        <p:nvSpPr>
+          <p:cNvPr id="31" name="Rectangle 30"/>
+          <p:cNvSpPr/>
+          <p:nvPr/>
+        </p:nvSpPr>
+        <p:spPr>
+          <a:xfrm>
+            <a:off x="8791956" y="2176272"/>
+            <a:ext cx="640080" cy="640080"/>
+          </a:xfrm>
+          <a:prstGeom prst="rect">
+            <a:avLst/>
+          </a:prstGeom>
+          <a:solidFill>
+            <a:srgbClr val="E87B00"/>
+          </a:solidFill>
+          <a:ln>
+            <a:solidFill>
+              <a:srgbClr val="E87B00"/>
+            </a:solidFill>
+          </a:ln>
+        </p:spPr>
+        <p:style>
+          <a:lnRef idx="1">
+            <a:schemeClr val="accent1"/>
+          </a:lnRef>
+          <a:fillRef idx="3">
+            <a:schemeClr val="accent1"/>
+          </a:fillRef>
+          <a:effectRef idx="2">
+            <a:schemeClr val="accent1"/>
+          </a:effectRef>
+          <a:fontRef idx="minor">
+            <a:schemeClr val="lt1"/>
+          </a:fontRef>
+        </p:style>
+        <p:txBody>
+          <a:bodyPr rtlCol="0" anchor="ctr"/>
+          <a:lstStyle/>
+          <a:p>
+            <a:pPr algn="ctr"/>
+          </a:p>
+        </p:txBody>
+      </p:sp>
+      <p:sp>
+        <p:nvSpPr>
+          <p:cNvPr id="32" name="TextBox 31"/>
+          <p:cNvSpPr txBox="1"/>
+          <p:nvPr/>
+        </p:nvSpPr>
+        <p:spPr>
+          <a:xfrm>
+            <a:off x="8791956" y="2176272"/>
+            <a:ext cx="640080" cy="640080"/>
+          </a:xfrm>
+          <a:prstGeom prst="rect">
+            <a:avLst/>
+          </a:prstGeom>
+          <a:noFill/>
+        </p:spPr>
+        <p:txBody>
+          <a:bodyPr wrap="square">
+            <a:spAutoFit/>
+          </a:bodyPr>
+          <a:lstStyle/>
+          <a:p>
+            <a:pPr algn="ctr"/>
+            <a:r>
+              <a:rPr sz="2000" b="1" i="0">
+                <a:solidFill>
+                  <a:srgbClr val="FFFFFF"/>
+                </a:solidFill>
+              </a:rPr>
+              <a:t>5</a:t>
+            </a:r>
+          </a:p>
+        </p:txBody>
+      </p:sp>
+      <p:sp>
+        <p:nvSpPr>
+          <p:cNvPr id="33" name="TextBox 32"/>
+          <p:cNvSpPr txBox="1"/>
+          <p:nvPr/>
+        </p:nvSpPr>
+        <p:spPr>
+          <a:xfrm>
+            <a:off x="8334756" y="3017520"/>
+            <a:ext cx="1554480" cy="548640"/>
+          </a:xfrm>
+          <a:prstGeom prst="rect">
+            <a:avLst/>
+          </a:prstGeom>
+          <a:noFill/>
+        </p:spPr>
+        <p:txBody>
+          <a:bodyPr wrap="square">
+            <a:spAutoFit/>
+          </a:bodyPr>
+          <a:lstStyle/>
+          <a:p>
+            <a:pPr algn="ctr"/>
+            <a:r>
+              <a:rPr sz="1400" b="1" i="0">
+                <a:solidFill>
+                  <a:srgbClr val="FFFFFF"/>
+                </a:solidFill>
+              </a:rPr>
+              <a:t>Sincronizar</a:t>
+            </a:r>
+          </a:p>
+        </p:txBody>
+      </p:sp>
+      <p:sp>
+        <p:nvSpPr>
+          <p:cNvPr id="34" name="TextBox 33"/>
+          <p:cNvSpPr txBox="1"/>
+          <p:nvPr/>
+        </p:nvSpPr>
+        <p:spPr>
+          <a:xfrm>
+            <a:off x="8334756" y="3703320"/>
+            <a:ext cx="1554480" cy="1645920"/>
+          </a:xfrm>
+          <a:prstGeom prst="rect">
+            <a:avLst/>
+          </a:prstGeom>
+          <a:noFill/>
+        </p:spPr>
+        <p:txBody>
+          <a:bodyPr wrap="square">
+            <a:spAutoFit/>
+          </a:bodyPr>
+          <a:lstStyle/>
+          <a:p>
+            <a:pPr algn="ctr"/>
+            <a:r>
+              <a:rPr sz="1100" b="0" i="0">
+                <a:solidFill>
+                  <a:srgbClr val="D6E4F7"/>
+                </a:solidFill>
+              </a:rPr>
+              <a:t>Envie de volta ao DevOps
+datas, horas, estados
+e novos work items</a:t>
+            </a:r>
+          </a:p>
+        </p:txBody>
+      </p:sp>
+      <p:sp>
+        <p:nvSpPr>
+          <p:cNvPr id="35" name="TextBox 34"/>
+          <p:cNvSpPr txBox="1"/>
+          <p:nvPr/>
+        </p:nvSpPr>
+        <p:spPr>
+          <a:xfrm>
+            <a:off x="10072116" y="3611880"/>
+            <a:ext cx="182880" cy="274320"/>
+          </a:xfrm>
+          <a:prstGeom prst="rect">
+            <a:avLst/>
+          </a:prstGeom>
+          <a:noFill/>
+        </p:spPr>
+        <p:txBody>
+          <a:bodyPr wrap="square">
+            <a:spAutoFit/>
+          </a:bodyPr>
+          <a:lstStyle/>
+          <a:p>
+            <a:pPr algn="ctr"/>
+            <a:r>
+              <a:rPr sz="2200" b="1" i="0">
+                <a:solidFill>
+                  <a:srgbClr val="1A3A6B"/>
+                </a:solidFill>
+              </a:rPr>
+              <a:t>→</a:t>
+            </a:r>
+          </a:p>
+        </p:txBody>
+      </p:sp>
+      <p:sp>
+        <p:nvSpPr>
+          <p:cNvPr id="36" name="Rectangle 35"/>
+          <p:cNvSpPr/>
+          <p:nvPr/>
+        </p:nvSpPr>
+        <p:spPr>
+          <a:xfrm>
+            <a:off x="10254996" y="2011680"/>
+            <a:ext cx="1737360" cy="3474720"/>
+          </a:xfrm>
+          <a:prstGeom prst="rect">
+            <a:avLst/>
+          </a:prstGeom>
+          <a:solidFill>
+            <a:srgbClr val="2B579A"/>
+          </a:solidFill>
+          <a:ln>
+            <a:solidFill>
+              <a:srgbClr val="2B579A"/>
+            </a:solidFill>
+          </a:ln>
+        </p:spPr>
+        <p:style>
+          <a:lnRef idx="1">
+            <a:schemeClr val="accent1"/>
+          </a:lnRef>
+          <a:fillRef idx="3">
+            <a:schemeClr val="accent1"/>
+          </a:fillRef>
+          <a:effectRef idx="2">
+            <a:schemeClr val="accent1"/>
+          </a:effectRef>
+          <a:fontRef idx="minor">
+            <a:schemeClr val="lt1"/>
+          </a:fontRef>
+        </p:style>
+        <p:txBody>
+          <a:bodyPr rtlCol="0" anchor="ctr"/>
+          <a:lstStyle/>
+          <a:p>
+            <a:pPr algn="ctr"/>
+          </a:p>
+        </p:txBody>
+      </p:sp>
+      <p:sp>
+        <p:nvSpPr>
+          <p:cNvPr id="37" name="Rectangle 36"/>
+          <p:cNvSpPr/>
+          <p:nvPr/>
+        </p:nvSpPr>
+        <p:spPr>
+          <a:xfrm>
+            <a:off x="10803636" y="2176272"/>
+            <a:ext cx="640080" cy="640080"/>
+          </a:xfrm>
+          <a:prstGeom prst="rect">
+            <a:avLst/>
+          </a:prstGeom>
+          <a:solidFill>
+            <a:srgbClr val="E87B00"/>
+          </a:solidFill>
+          <a:ln>
+            <a:solidFill>
+              <a:srgbClr val="E87B00"/>
+            </a:solidFill>
+          </a:ln>
+        </p:spPr>
+        <p:style>
+          <a:lnRef idx="1">
+            <a:schemeClr val="accent1"/>
+          </a:lnRef>
+          <a:fillRef idx="3">
+            <a:schemeClr val="accent1"/>
+          </a:fillRef>
+          <a:effectRef idx="2">
+            <a:schemeClr val="accent1"/>
+          </a:effectRef>
+          <a:fontRef idx="minor">
+            <a:schemeClr val="lt1"/>
+          </a:fontRef>
+        </p:style>
+        <p:txBody>
+          <a:bodyPr rtlCol="0" anchor="ctr"/>
+          <a:lstStyle/>
+          <a:p>
+            <a:pPr algn="ctr"/>
+          </a:p>
+        </p:txBody>
+      </p:sp>
+      <p:sp>
+        <p:nvSpPr>
+          <p:cNvPr id="38" name="TextBox 37"/>
+          <p:cNvSpPr txBox="1"/>
+          <p:nvPr/>
+        </p:nvSpPr>
+        <p:spPr>
+          <a:xfrm>
+            <a:off x="10803636" y="2176272"/>
+            <a:ext cx="640080" cy="640080"/>
+          </a:xfrm>
+          <a:prstGeom prst="rect">
+            <a:avLst/>
+          </a:prstGeom>
+          <a:noFill/>
+        </p:spPr>
+        <p:txBody>
+          <a:bodyPr wrap="square">
+            <a:spAutoFit/>
+          </a:bodyPr>
+          <a:lstStyle/>
+          <a:p>
+            <a:pPr algn="ctr"/>
+            <a:r>
+              <a:rPr sz="2000" b="1" i="0">
+                <a:solidFill>
+                  <a:srgbClr val="FFFFFF"/>
+                </a:solidFill>
+              </a:rPr>
+              <a:t>6</a:t>
+            </a:r>
+          </a:p>
+        </p:txBody>
+      </p:sp>
+      <p:sp>
+        <p:nvSpPr>
+          <p:cNvPr id="39" name="TextBox 38"/>
+          <p:cNvSpPr txBox="1"/>
+          <p:nvPr/>
+        </p:nvSpPr>
+        <p:spPr>
+          <a:xfrm>
+            <a:off x="10346436" y="3017520"/>
+            <a:ext cx="1554480" cy="548640"/>
+          </a:xfrm>
+          <a:prstGeom prst="rect">
+            <a:avLst/>
+          </a:prstGeom>
+          <a:noFill/>
+        </p:spPr>
+        <p:txBody>
+          <a:bodyPr wrap="square">
+            <a:spAutoFit/>
+          </a:bodyPr>
+          <a:lstStyle/>
+          <a:p>
+            <a:pPr algn="ctr"/>
+            <a:r>
+              <a:rPr sz="1400" b="1" i="0">
+                <a:solidFill>
+                  <a:srgbClr val="FFFFFF"/>
+                </a:solidFill>
+              </a:rPr>
+              <a:t>Monitorar</a:t>
+            </a:r>
+          </a:p>
+        </p:txBody>
+      </p:sp>
+      <p:sp>
+        <p:nvSpPr>
+          <p:cNvPr id="40" name="TextBox 39"/>
+          <p:cNvSpPr txBox="1"/>
+          <p:nvPr/>
+        </p:nvSpPr>
+        <p:spPr>
+          <a:xfrm>
+            <a:off x="10346436" y="3703320"/>
+            <a:ext cx="1554480" cy="1645920"/>
+          </a:xfrm>
+          <a:prstGeom prst="rect">
+            <a:avLst/>
+          </a:prstGeom>
+          <a:noFill/>
+        </p:spPr>
+        <p:txBody>
+          <a:bodyPr wrap="square">
+            <a:spAutoFit/>
+          </a:bodyPr>
+          <a:lstStyle/>
+          <a:p>
+            <a:pPr algn="ctr"/>
+            <a:r>
+              <a:rPr sz="1100" b="0" i="0">
+                <a:solidFill>
+                  <a:srgbClr val="D6E4F7"/>
+                </a:solidFill>
+              </a:rPr>
+              <a:t>Health Check automático
+alerta atrasos,
+bloqueios e sobrecarga</a:t>
             </a:r>
           </a:p>
         </p:txBody>
@@ -9319,6 +9839,964 @@
 </file>
 
 <file path=ppt/slides/slide8.xml><?xml version="1.0" encoding="utf-8"?>
+<p:sld xmlns:a="http://schemas.openxmlformats.org/drawingml/2006/main" xmlns:p="http://schemas.openxmlformats.org/presentationml/2006/main" xmlns:r="http://schemas.openxmlformats.org/officeDocument/2006/relationships">
+  <p:cSld>
+    <p:spTree>
+      <p:nvGrpSpPr>
+        <p:cNvPr id="1" name=""/>
+        <p:cNvGrpSpPr/>
+        <p:nvPr/>
+      </p:nvGrpSpPr>
+      <p:grpSpPr/>
+      <p:sp>
+        <p:nvSpPr>
+          <p:cNvPr id="2" name="Rectangle 1"/>
+          <p:cNvSpPr/>
+          <p:nvPr/>
+        </p:nvSpPr>
+        <p:spPr>
+          <a:xfrm>
+            <a:off x="0" y="0"/>
+            <a:ext cx="12188952" cy="6858000"/>
+          </a:xfrm>
+          <a:prstGeom prst="rect">
+            <a:avLst/>
+          </a:prstGeom>
+          <a:solidFill>
+            <a:srgbClr val="F4F6FB"/>
+          </a:solidFill>
+          <a:ln>
+            <a:solidFill>
+              <a:srgbClr val="F4F6FB"/>
+            </a:solidFill>
+          </a:ln>
+        </p:spPr>
+        <p:style>
+          <a:lnRef idx="1">
+            <a:schemeClr val="accent1"/>
+          </a:lnRef>
+          <a:fillRef idx="3">
+            <a:schemeClr val="accent1"/>
+          </a:fillRef>
+          <a:effectRef idx="2">
+            <a:schemeClr val="accent1"/>
+          </a:effectRef>
+          <a:fontRef idx="minor">
+            <a:schemeClr val="lt1"/>
+          </a:fontRef>
+        </p:style>
+        <p:txBody>
+          <a:bodyPr rtlCol="0" anchor="ctr"/>
+          <a:lstStyle/>
+          <a:p>
+            <a:pPr algn="ctr"/>
+          </a:p>
+        </p:txBody>
+      </p:sp>
+      <p:sp>
+        <p:nvSpPr>
+          <p:cNvPr id="3" name="Rectangle 2"/>
+          <p:cNvSpPr/>
+          <p:nvPr/>
+        </p:nvSpPr>
+        <p:spPr>
+          <a:xfrm>
+            <a:off x="0" y="0"/>
+            <a:ext cx="12188952" cy="1188720"/>
+          </a:xfrm>
+          <a:prstGeom prst="rect">
+            <a:avLst/>
+          </a:prstGeom>
+          <a:solidFill>
+            <a:srgbClr val="1A3A6B"/>
+          </a:solidFill>
+          <a:ln>
+            <a:solidFill>
+              <a:srgbClr val="1A3A6B"/>
+            </a:solidFill>
+          </a:ln>
+        </p:spPr>
+        <p:style>
+          <a:lnRef idx="1">
+            <a:schemeClr val="accent1"/>
+          </a:lnRef>
+          <a:fillRef idx="3">
+            <a:schemeClr val="accent1"/>
+          </a:fillRef>
+          <a:effectRef idx="2">
+            <a:schemeClr val="accent1"/>
+          </a:effectRef>
+          <a:fontRef idx="minor">
+            <a:schemeClr val="lt1"/>
+          </a:fontRef>
+        </p:style>
+        <p:txBody>
+          <a:bodyPr rtlCol="0" anchor="ctr"/>
+          <a:lstStyle/>
+          <a:p>
+            <a:pPr algn="ctr"/>
+          </a:p>
+        </p:txBody>
+      </p:sp>
+      <p:sp>
+        <p:nvSpPr>
+          <p:cNvPr id="4" name="Rectangle 3"/>
+          <p:cNvSpPr/>
+          <p:nvPr/>
+        </p:nvSpPr>
+        <p:spPr>
+          <a:xfrm>
+            <a:off x="0" y="1188720"/>
+            <a:ext cx="64008" cy="5669280"/>
+          </a:xfrm>
+          <a:prstGeom prst="rect">
+            <a:avLst/>
+          </a:prstGeom>
+          <a:solidFill>
+            <a:srgbClr val="E87B00"/>
+          </a:solidFill>
+          <a:ln>
+            <a:solidFill>
+              <a:srgbClr val="E87B00"/>
+            </a:solidFill>
+          </a:ln>
+        </p:spPr>
+        <p:style>
+          <a:lnRef idx="1">
+            <a:schemeClr val="accent1"/>
+          </a:lnRef>
+          <a:fillRef idx="3">
+            <a:schemeClr val="accent1"/>
+          </a:fillRef>
+          <a:effectRef idx="2">
+            <a:schemeClr val="accent1"/>
+          </a:effectRef>
+          <a:fontRef idx="minor">
+            <a:schemeClr val="lt1"/>
+          </a:fontRef>
+        </p:style>
+        <p:txBody>
+          <a:bodyPr rtlCol="0" anchor="ctr"/>
+          <a:lstStyle/>
+          <a:p>
+            <a:pPr algn="ctr"/>
+          </a:p>
+        </p:txBody>
+      </p:sp>
+      <p:sp>
+        <p:nvSpPr>
+          <p:cNvPr id="5" name="TextBox 4"/>
+          <p:cNvSpPr txBox="1"/>
+          <p:nvPr/>
+        </p:nvSpPr>
+        <p:spPr>
+          <a:xfrm>
+            <a:off x="457200" y="201168"/>
+            <a:ext cx="10972800" cy="731520"/>
+          </a:xfrm>
+          <a:prstGeom prst="rect">
+            <a:avLst/>
+          </a:prstGeom>
+          <a:noFill/>
+        </p:spPr>
+        <p:txBody>
+          <a:bodyPr wrap="square">
+            <a:spAutoFit/>
+          </a:bodyPr>
+          <a:lstStyle/>
+          <a:p>
+            <a:pPr algn="l"/>
+            <a:r>
+              <a:rPr sz="2800" b="1" i="0">
+                <a:solidFill>
+                  <a:srgbClr val="FFFFFF"/>
+                </a:solidFill>
+              </a:rPr>
+              <a:t>Para quem é o NXProject</a:t>
+            </a:r>
+          </a:p>
+        </p:txBody>
+      </p:sp>
+      <p:sp>
+        <p:nvSpPr>
+          <p:cNvPr id="6" name="Rectangle 5"/>
+          <p:cNvSpPr/>
+          <p:nvPr/>
+        </p:nvSpPr>
+        <p:spPr>
+          <a:xfrm>
+            <a:off x="457200" y="1554480"/>
+            <a:ext cx="2651760" cy="4663440"/>
+          </a:xfrm>
+          <a:prstGeom prst="rect">
+            <a:avLst/>
+          </a:prstGeom>
+          <a:solidFill>
+            <a:srgbClr val="FFFFFF"/>
+          </a:solidFill>
+          <a:ln>
+            <a:solidFill>
+              <a:srgbClr val="FFFFFF"/>
+            </a:solidFill>
+          </a:ln>
+        </p:spPr>
+        <p:style>
+          <a:lnRef idx="1">
+            <a:schemeClr val="accent1"/>
+          </a:lnRef>
+          <a:fillRef idx="3">
+            <a:schemeClr val="accent1"/>
+          </a:fillRef>
+          <a:effectRef idx="2">
+            <a:schemeClr val="accent1"/>
+          </a:effectRef>
+          <a:fontRef idx="minor">
+            <a:schemeClr val="lt1"/>
+          </a:fontRef>
+        </p:style>
+        <p:txBody>
+          <a:bodyPr rtlCol="0" anchor="ctr"/>
+          <a:lstStyle/>
+          <a:p>
+            <a:pPr algn="ctr"/>
+          </a:p>
+        </p:txBody>
+      </p:sp>
+      <p:sp>
+        <p:nvSpPr>
+          <p:cNvPr id="7" name="Rectangle 6"/>
+          <p:cNvSpPr/>
+          <p:nvPr/>
+        </p:nvSpPr>
+        <p:spPr>
+          <a:xfrm>
+            <a:off x="457200" y="1554480"/>
+            <a:ext cx="2651760" cy="54864"/>
+          </a:xfrm>
+          <a:prstGeom prst="rect">
+            <a:avLst/>
+          </a:prstGeom>
+          <a:solidFill>
+            <a:srgbClr val="E87B00"/>
+          </a:solidFill>
+          <a:ln>
+            <a:solidFill>
+              <a:srgbClr val="E87B00"/>
+            </a:solidFill>
+          </a:ln>
+        </p:spPr>
+        <p:style>
+          <a:lnRef idx="1">
+            <a:schemeClr val="accent1"/>
+          </a:lnRef>
+          <a:fillRef idx="3">
+            <a:schemeClr val="accent1"/>
+          </a:fillRef>
+          <a:effectRef idx="2">
+            <a:schemeClr val="accent1"/>
+          </a:effectRef>
+          <a:fontRef idx="minor">
+            <a:schemeClr val="lt1"/>
+          </a:fontRef>
+        </p:style>
+        <p:txBody>
+          <a:bodyPr rtlCol="0" anchor="ctr"/>
+          <a:lstStyle/>
+          <a:p>
+            <a:pPr algn="ctr"/>
+          </a:p>
+        </p:txBody>
+      </p:sp>
+      <p:sp>
+        <p:nvSpPr>
+          <p:cNvPr id="8" name="TextBox 7"/>
+          <p:cNvSpPr txBox="1"/>
+          <p:nvPr/>
+        </p:nvSpPr>
+        <p:spPr>
+          <a:xfrm>
+            <a:off x="457200" y="1737360"/>
+            <a:ext cx="2651760" cy="640080"/>
+          </a:xfrm>
+          <a:prstGeom prst="rect">
+            <a:avLst/>
+          </a:prstGeom>
+          <a:noFill/>
+        </p:spPr>
+        <p:txBody>
+          <a:bodyPr wrap="square">
+            <a:spAutoFit/>
+          </a:bodyPr>
+          <a:lstStyle/>
+          <a:p>
+            <a:pPr algn="ctr"/>
+            <a:r>
+              <a:rPr sz="3400" b="0" i="0">
+                <a:solidFill>
+                  <a:srgbClr val="2D2D2D"/>
+                </a:solidFill>
+              </a:rPr>
+              <a:t>🧑‍💼</a:t>
+            </a:r>
+          </a:p>
+        </p:txBody>
+      </p:sp>
+      <p:sp>
+        <p:nvSpPr>
+          <p:cNvPr id="9" name="TextBox 8"/>
+          <p:cNvSpPr txBox="1"/>
+          <p:nvPr/>
+        </p:nvSpPr>
+        <p:spPr>
+          <a:xfrm>
+            <a:off x="548640" y="2468880"/>
+            <a:ext cx="2468880" cy="731520"/>
+          </a:xfrm>
+          <a:prstGeom prst="rect">
+            <a:avLst/>
+          </a:prstGeom>
+          <a:noFill/>
+        </p:spPr>
+        <p:txBody>
+          <a:bodyPr wrap="square">
+            <a:spAutoFit/>
+          </a:bodyPr>
+          <a:lstStyle/>
+          <a:p>
+            <a:pPr algn="ctr"/>
+            <a:r>
+              <a:rPr sz="1400" b="1" i="0">
+                <a:solidFill>
+                  <a:srgbClr val="1A3A6B"/>
+                </a:solidFill>
+              </a:rPr>
+              <a:t>Gerente
+de Projeto</a:t>
+            </a:r>
+          </a:p>
+        </p:txBody>
+      </p:sp>
+      <p:sp>
+        <p:nvSpPr>
+          <p:cNvPr id="10" name="TextBox 9"/>
+          <p:cNvSpPr txBox="1"/>
+          <p:nvPr/>
+        </p:nvSpPr>
+        <p:spPr>
+          <a:xfrm>
+            <a:off x="594360" y="3291840"/>
+            <a:ext cx="2377440" cy="2743200"/>
+          </a:xfrm>
+          <a:prstGeom prst="rect">
+            <a:avLst/>
+          </a:prstGeom>
+          <a:noFill/>
+        </p:spPr>
+        <p:txBody>
+          <a:bodyPr wrap="square">
+            <a:spAutoFit/>
+          </a:bodyPr>
+          <a:lstStyle/>
+          <a:p>
+            <a:pPr algn="ctr"/>
+            <a:r>
+              <a:rPr sz="1100" b="0" i="0">
+                <a:solidFill>
+                  <a:srgbClr val="555F6E"/>
+                </a:solidFill>
+              </a:rPr>
+              <a:t>Cronograma integrado ao backlog, alertas de atraso, visão de dependências e datas negociadas.</a:t>
+            </a:r>
+          </a:p>
+        </p:txBody>
+      </p:sp>
+      <p:sp>
+        <p:nvSpPr>
+          <p:cNvPr id="11" name="Rectangle 10"/>
+          <p:cNvSpPr/>
+          <p:nvPr/>
+        </p:nvSpPr>
+        <p:spPr>
+          <a:xfrm>
+            <a:off x="3383280" y="1554480"/>
+            <a:ext cx="2651760" cy="4663440"/>
+          </a:xfrm>
+          <a:prstGeom prst="rect">
+            <a:avLst/>
+          </a:prstGeom>
+          <a:solidFill>
+            <a:srgbClr val="FFFFFF"/>
+          </a:solidFill>
+          <a:ln>
+            <a:solidFill>
+              <a:srgbClr val="FFFFFF"/>
+            </a:solidFill>
+          </a:ln>
+        </p:spPr>
+        <p:style>
+          <a:lnRef idx="1">
+            <a:schemeClr val="accent1"/>
+          </a:lnRef>
+          <a:fillRef idx="3">
+            <a:schemeClr val="accent1"/>
+          </a:fillRef>
+          <a:effectRef idx="2">
+            <a:schemeClr val="accent1"/>
+          </a:effectRef>
+          <a:fontRef idx="minor">
+            <a:schemeClr val="lt1"/>
+          </a:fontRef>
+        </p:style>
+        <p:txBody>
+          <a:bodyPr rtlCol="0" anchor="ctr"/>
+          <a:lstStyle/>
+          <a:p>
+            <a:pPr algn="ctr"/>
+          </a:p>
+        </p:txBody>
+      </p:sp>
+      <p:sp>
+        <p:nvSpPr>
+          <p:cNvPr id="12" name="Rectangle 11"/>
+          <p:cNvSpPr/>
+          <p:nvPr/>
+        </p:nvSpPr>
+        <p:spPr>
+          <a:xfrm>
+            <a:off x="3383280" y="1554480"/>
+            <a:ext cx="2651760" cy="54864"/>
+          </a:xfrm>
+          <a:prstGeom prst="rect">
+            <a:avLst/>
+          </a:prstGeom>
+          <a:solidFill>
+            <a:srgbClr val="E87B00"/>
+          </a:solidFill>
+          <a:ln>
+            <a:solidFill>
+              <a:srgbClr val="E87B00"/>
+            </a:solidFill>
+          </a:ln>
+        </p:spPr>
+        <p:style>
+          <a:lnRef idx="1">
+            <a:schemeClr val="accent1"/>
+          </a:lnRef>
+          <a:fillRef idx="3">
+            <a:schemeClr val="accent1"/>
+          </a:fillRef>
+          <a:effectRef idx="2">
+            <a:schemeClr val="accent1"/>
+          </a:effectRef>
+          <a:fontRef idx="minor">
+            <a:schemeClr val="lt1"/>
+          </a:fontRef>
+        </p:style>
+        <p:txBody>
+          <a:bodyPr rtlCol="0" anchor="ctr"/>
+          <a:lstStyle/>
+          <a:p>
+            <a:pPr algn="ctr"/>
+          </a:p>
+        </p:txBody>
+      </p:sp>
+      <p:sp>
+        <p:nvSpPr>
+          <p:cNvPr id="13" name="TextBox 12"/>
+          <p:cNvSpPr txBox="1"/>
+          <p:nvPr/>
+        </p:nvSpPr>
+        <p:spPr>
+          <a:xfrm>
+            <a:off x="3383280" y="1737360"/>
+            <a:ext cx="2651760" cy="640080"/>
+          </a:xfrm>
+          <a:prstGeom prst="rect">
+            <a:avLst/>
+          </a:prstGeom>
+          <a:noFill/>
+        </p:spPr>
+        <p:txBody>
+          <a:bodyPr wrap="square">
+            <a:spAutoFit/>
+          </a:bodyPr>
+          <a:lstStyle/>
+          <a:p>
+            <a:pPr algn="ctr"/>
+            <a:r>
+              <a:rPr sz="3400" b="0" i="0">
+                <a:solidFill>
+                  <a:srgbClr val="2D2D2D"/>
+                </a:solidFill>
+              </a:rPr>
+              <a:t>🔄</a:t>
+            </a:r>
+          </a:p>
+        </p:txBody>
+      </p:sp>
+      <p:sp>
+        <p:nvSpPr>
+          <p:cNvPr id="14" name="TextBox 13"/>
+          <p:cNvSpPr txBox="1"/>
+          <p:nvPr/>
+        </p:nvSpPr>
+        <p:spPr>
+          <a:xfrm>
+            <a:off x="3474720" y="2468880"/>
+            <a:ext cx="2468880" cy="731520"/>
+          </a:xfrm>
+          <a:prstGeom prst="rect">
+            <a:avLst/>
+          </a:prstGeom>
+          <a:noFill/>
+        </p:spPr>
+        <p:txBody>
+          <a:bodyPr wrap="square">
+            <a:spAutoFit/>
+          </a:bodyPr>
+          <a:lstStyle/>
+          <a:p>
+            <a:pPr algn="ctr"/>
+            <a:r>
+              <a:rPr sz="1400" b="1" i="0">
+                <a:solidFill>
+                  <a:srgbClr val="1A3A6B"/>
+                </a:solidFill>
+              </a:rPr>
+              <a:t>Scrum Master
+/ RTE</a:t>
+            </a:r>
+          </a:p>
+        </p:txBody>
+      </p:sp>
+      <p:sp>
+        <p:nvSpPr>
+          <p:cNvPr id="15" name="TextBox 14"/>
+          <p:cNvSpPr txBox="1"/>
+          <p:nvPr/>
+        </p:nvSpPr>
+        <p:spPr>
+          <a:xfrm>
+            <a:off x="3520440" y="3291840"/>
+            <a:ext cx="2377440" cy="2743200"/>
+          </a:xfrm>
+          <a:prstGeom prst="rect">
+            <a:avLst/>
+          </a:prstGeom>
+          <a:noFill/>
+        </p:spPr>
+        <p:txBody>
+          <a:bodyPr wrap="square">
+            <a:spAutoFit/>
+          </a:bodyPr>
+          <a:lstStyle/>
+          <a:p>
+            <a:pPr algn="ctr"/>
+            <a:r>
+              <a:rPr sz="1100" b="0" i="0">
+                <a:solidFill>
+                  <a:srgbClr val="555F6E"/>
+                </a:solidFill>
+              </a:rPr>
+              <a:t>Capacidade por sprint, conflito de alocação, impacto de mudanças e cascata automática.</a:t>
+            </a:r>
+          </a:p>
+        </p:txBody>
+      </p:sp>
+      <p:sp>
+        <p:nvSpPr>
+          <p:cNvPr id="16" name="Rectangle 15"/>
+          <p:cNvSpPr/>
+          <p:nvPr/>
+        </p:nvSpPr>
+        <p:spPr>
+          <a:xfrm>
+            <a:off x="6309360" y="1554480"/>
+            <a:ext cx="2651760" cy="4663440"/>
+          </a:xfrm>
+          <a:prstGeom prst="rect">
+            <a:avLst/>
+          </a:prstGeom>
+          <a:solidFill>
+            <a:srgbClr val="FFFFFF"/>
+          </a:solidFill>
+          <a:ln>
+            <a:solidFill>
+              <a:srgbClr val="FFFFFF"/>
+            </a:solidFill>
+          </a:ln>
+        </p:spPr>
+        <p:style>
+          <a:lnRef idx="1">
+            <a:schemeClr val="accent1"/>
+          </a:lnRef>
+          <a:fillRef idx="3">
+            <a:schemeClr val="accent1"/>
+          </a:fillRef>
+          <a:effectRef idx="2">
+            <a:schemeClr val="accent1"/>
+          </a:effectRef>
+          <a:fontRef idx="minor">
+            <a:schemeClr val="lt1"/>
+          </a:fontRef>
+        </p:style>
+        <p:txBody>
+          <a:bodyPr rtlCol="0" anchor="ctr"/>
+          <a:lstStyle/>
+          <a:p>
+            <a:pPr algn="ctr"/>
+          </a:p>
+        </p:txBody>
+      </p:sp>
+      <p:sp>
+        <p:nvSpPr>
+          <p:cNvPr id="17" name="Rectangle 16"/>
+          <p:cNvSpPr/>
+          <p:nvPr/>
+        </p:nvSpPr>
+        <p:spPr>
+          <a:xfrm>
+            <a:off x="6309360" y="1554480"/>
+            <a:ext cx="2651760" cy="54864"/>
+          </a:xfrm>
+          <a:prstGeom prst="rect">
+            <a:avLst/>
+          </a:prstGeom>
+          <a:solidFill>
+            <a:srgbClr val="E87B00"/>
+          </a:solidFill>
+          <a:ln>
+            <a:solidFill>
+              <a:srgbClr val="E87B00"/>
+            </a:solidFill>
+          </a:ln>
+        </p:spPr>
+        <p:style>
+          <a:lnRef idx="1">
+            <a:schemeClr val="accent1"/>
+          </a:lnRef>
+          <a:fillRef idx="3">
+            <a:schemeClr val="accent1"/>
+          </a:fillRef>
+          <a:effectRef idx="2">
+            <a:schemeClr val="accent1"/>
+          </a:effectRef>
+          <a:fontRef idx="minor">
+            <a:schemeClr val="lt1"/>
+          </a:fontRef>
+        </p:style>
+        <p:txBody>
+          <a:bodyPr rtlCol="0" anchor="ctr"/>
+          <a:lstStyle/>
+          <a:p>
+            <a:pPr algn="ctr"/>
+          </a:p>
+        </p:txBody>
+      </p:sp>
+      <p:sp>
+        <p:nvSpPr>
+          <p:cNvPr id="18" name="TextBox 17"/>
+          <p:cNvSpPr txBox="1"/>
+          <p:nvPr/>
+        </p:nvSpPr>
+        <p:spPr>
+          <a:xfrm>
+            <a:off x="6309360" y="1737360"/>
+            <a:ext cx="2651760" cy="640080"/>
+          </a:xfrm>
+          <a:prstGeom prst="rect">
+            <a:avLst/>
+          </a:prstGeom>
+          <a:noFill/>
+        </p:spPr>
+        <p:txBody>
+          <a:bodyPr wrap="square">
+            <a:spAutoFit/>
+          </a:bodyPr>
+          <a:lstStyle/>
+          <a:p>
+            <a:pPr algn="ctr"/>
+            <a:r>
+              <a:rPr sz="3400" b="0" i="0">
+                <a:solidFill>
+                  <a:srgbClr val="2D2D2D"/>
+                </a:solidFill>
+              </a:rPr>
+              <a:t>💻</a:t>
+            </a:r>
+          </a:p>
+        </p:txBody>
+      </p:sp>
+      <p:sp>
+        <p:nvSpPr>
+          <p:cNvPr id="19" name="TextBox 18"/>
+          <p:cNvSpPr txBox="1"/>
+          <p:nvPr/>
+        </p:nvSpPr>
+        <p:spPr>
+          <a:xfrm>
+            <a:off x="6400800" y="2468880"/>
+            <a:ext cx="2468880" cy="731520"/>
+          </a:xfrm>
+          <a:prstGeom prst="rect">
+            <a:avLst/>
+          </a:prstGeom>
+          <a:noFill/>
+        </p:spPr>
+        <p:txBody>
+          <a:bodyPr wrap="square">
+            <a:spAutoFit/>
+          </a:bodyPr>
+          <a:lstStyle/>
+          <a:p>
+            <a:pPr algn="ctr"/>
+            <a:r>
+              <a:rPr sz="1400" b="1" i="0">
+                <a:solidFill>
+                  <a:srgbClr val="1A3A6B"/>
+                </a:solidFill>
+              </a:rPr>
+              <a:t>Tech Lead</a:t>
+            </a:r>
+          </a:p>
+        </p:txBody>
+      </p:sp>
+      <p:sp>
+        <p:nvSpPr>
+          <p:cNvPr id="20" name="TextBox 19"/>
+          <p:cNvSpPr txBox="1"/>
+          <p:nvPr/>
+        </p:nvSpPr>
+        <p:spPr>
+          <a:xfrm>
+            <a:off x="6446520" y="3291840"/>
+            <a:ext cx="2377440" cy="2743200"/>
+          </a:xfrm>
+          <a:prstGeom prst="rect">
+            <a:avLst/>
+          </a:prstGeom>
+          <a:noFill/>
+        </p:spPr>
+        <p:txBody>
+          <a:bodyPr wrap="square">
+            <a:spAutoFit/>
+          </a:bodyPr>
+          <a:lstStyle/>
+          <a:p>
+            <a:pPr algn="ctr"/>
+            <a:r>
+              <a:rPr sz="1100" b="0" i="0">
+                <a:solidFill>
+                  <a:srgbClr val="555F6E"/>
+                </a:solidFill>
+              </a:rPr>
+              <a:t>Visão de Features e Stories com predecessoras, estimativas em horas e rastreabilidade.</a:t>
+            </a:r>
+          </a:p>
+        </p:txBody>
+      </p:sp>
+      <p:sp>
+        <p:nvSpPr>
+          <p:cNvPr id="21" name="Rectangle 20"/>
+          <p:cNvSpPr/>
+          <p:nvPr/>
+        </p:nvSpPr>
+        <p:spPr>
+          <a:xfrm>
+            <a:off x="9235440" y="1554480"/>
+            <a:ext cx="2651760" cy="4663440"/>
+          </a:xfrm>
+          <a:prstGeom prst="rect">
+            <a:avLst/>
+          </a:prstGeom>
+          <a:solidFill>
+            <a:srgbClr val="FFFFFF"/>
+          </a:solidFill>
+          <a:ln>
+            <a:solidFill>
+              <a:srgbClr val="FFFFFF"/>
+            </a:solidFill>
+          </a:ln>
+        </p:spPr>
+        <p:style>
+          <a:lnRef idx="1">
+            <a:schemeClr val="accent1"/>
+          </a:lnRef>
+          <a:fillRef idx="3">
+            <a:schemeClr val="accent1"/>
+          </a:fillRef>
+          <a:effectRef idx="2">
+            <a:schemeClr val="accent1"/>
+          </a:effectRef>
+          <a:fontRef idx="minor">
+            <a:schemeClr val="lt1"/>
+          </a:fontRef>
+        </p:style>
+        <p:txBody>
+          <a:bodyPr rtlCol="0" anchor="ctr"/>
+          <a:lstStyle/>
+          <a:p>
+            <a:pPr algn="ctr"/>
+          </a:p>
+        </p:txBody>
+      </p:sp>
+      <p:sp>
+        <p:nvSpPr>
+          <p:cNvPr id="22" name="Rectangle 21"/>
+          <p:cNvSpPr/>
+          <p:nvPr/>
+        </p:nvSpPr>
+        <p:spPr>
+          <a:xfrm>
+            <a:off x="9235440" y="1554480"/>
+            <a:ext cx="2651760" cy="54864"/>
+          </a:xfrm>
+          <a:prstGeom prst="rect">
+            <a:avLst/>
+          </a:prstGeom>
+          <a:solidFill>
+            <a:srgbClr val="E87B00"/>
+          </a:solidFill>
+          <a:ln>
+            <a:solidFill>
+              <a:srgbClr val="E87B00"/>
+            </a:solidFill>
+          </a:ln>
+        </p:spPr>
+        <p:style>
+          <a:lnRef idx="1">
+            <a:schemeClr val="accent1"/>
+          </a:lnRef>
+          <a:fillRef idx="3">
+            <a:schemeClr val="accent1"/>
+          </a:fillRef>
+          <a:effectRef idx="2">
+            <a:schemeClr val="accent1"/>
+          </a:effectRef>
+          <a:fontRef idx="minor">
+            <a:schemeClr val="lt1"/>
+          </a:fontRef>
+        </p:style>
+        <p:txBody>
+          <a:bodyPr rtlCol="0" anchor="ctr"/>
+          <a:lstStyle/>
+          <a:p>
+            <a:pPr algn="ctr"/>
+          </a:p>
+        </p:txBody>
+      </p:sp>
+      <p:sp>
+        <p:nvSpPr>
+          <p:cNvPr id="23" name="TextBox 22"/>
+          <p:cNvSpPr txBox="1"/>
+          <p:nvPr/>
+        </p:nvSpPr>
+        <p:spPr>
+          <a:xfrm>
+            <a:off x="9235440" y="1737360"/>
+            <a:ext cx="2651760" cy="640080"/>
+          </a:xfrm>
+          <a:prstGeom prst="rect">
+            <a:avLst/>
+          </a:prstGeom>
+          <a:noFill/>
+        </p:spPr>
+        <p:txBody>
+          <a:bodyPr wrap="square">
+            <a:spAutoFit/>
+          </a:bodyPr>
+          <a:lstStyle/>
+          <a:p>
+            <a:pPr algn="ctr"/>
+            <a:r>
+              <a:rPr sz="3400" b="0" i="0">
+                <a:solidFill>
+                  <a:srgbClr val="2D2D2D"/>
+                </a:solidFill>
+              </a:rPr>
+              <a:t>📊</a:t>
+            </a:r>
+          </a:p>
+        </p:txBody>
+      </p:sp>
+      <p:sp>
+        <p:nvSpPr>
+          <p:cNvPr id="24" name="TextBox 23"/>
+          <p:cNvSpPr txBox="1"/>
+          <p:nvPr/>
+        </p:nvSpPr>
+        <p:spPr>
+          <a:xfrm>
+            <a:off x="9326880" y="2468880"/>
+            <a:ext cx="2468880" cy="731520"/>
+          </a:xfrm>
+          <a:prstGeom prst="rect">
+            <a:avLst/>
+          </a:prstGeom>
+          <a:noFill/>
+        </p:spPr>
+        <p:txBody>
+          <a:bodyPr wrap="square">
+            <a:spAutoFit/>
+          </a:bodyPr>
+          <a:lstStyle/>
+          <a:p>
+            <a:pPr algn="ctr"/>
+            <a:r>
+              <a:rPr sz="1400" b="1" i="0">
+                <a:solidFill>
+                  <a:srgbClr val="1A3A6B"/>
+                </a:solidFill>
+              </a:rPr>
+              <a:t>Gestão
+/ PMO</a:t>
+            </a:r>
+          </a:p>
+        </p:txBody>
+      </p:sp>
+      <p:sp>
+        <p:nvSpPr>
+          <p:cNvPr id="25" name="TextBox 24"/>
+          <p:cNvSpPr txBox="1"/>
+          <p:nvPr/>
+        </p:nvSpPr>
+        <p:spPr>
+          <a:xfrm>
+            <a:off x="9372600" y="3291840"/>
+            <a:ext cx="2377440" cy="2743200"/>
+          </a:xfrm>
+          <a:prstGeom prst="rect">
+            <a:avLst/>
+          </a:prstGeom>
+          <a:noFill/>
+        </p:spPr>
+        <p:txBody>
+          <a:bodyPr wrap="square">
+            <a:spAutoFit/>
+          </a:bodyPr>
+          <a:lstStyle/>
+          <a:p>
+            <a:pPr algn="ctr"/>
+            <a:r>
+              <a:rPr sz="1100" b="0" i="0">
+                <a:solidFill>
+                  <a:srgbClr val="555F6E"/>
+                </a:solidFill>
+              </a:rPr>
+              <a:t>Visão consolidada do portfólio, exportação para MS Project/Excel e Health Check executivo.</a:t>
+            </a:r>
+          </a:p>
+        </p:txBody>
+      </p:sp>
+    </p:spTree>
+  </p:cSld>
+  <p:clrMapOvr>
+    <a:masterClrMapping/>
+  </p:clrMapOvr>
+</p:sld>
+</file>
+
+<file path=ppt/slides/slide9.xml><?xml version="1.0" encoding="utf-8"?>
 <p:sld xmlns:a="http://schemas.openxmlformats.org/drawingml/2006/main" xmlns:p="http://schemas.openxmlformats.org/presentationml/2006/main" xmlns:r="http://schemas.openxmlformats.org/officeDocument/2006/relationships">
   <p:cSld>
     <p:spTree>
